--- a/Project_Tree_プレゼン資料.pptx
+++ b/Project_Tree_プレゼン資料.pptx
@@ -5682,7 +5682,7 @@
                 <a:ea typeface="Century Schoolbook" pitchFamily="34" charset="-122"/>
                 <a:cs typeface="Century Schoolbook" pitchFamily="34" charset="-120"/>
               </a:rPr>
-              <a:t>モデルを活用する</a:t>
+              <a:t>モデルを作る・活用する</a:t>
             </a:r>
             <a:endParaRPr lang="en-US" sz="1350" dirty="0"/>
           </a:p>
@@ -5724,7 +5724,7 @@
                 <a:ea typeface="Calibri" pitchFamily="34" charset="-122"/>
                 <a:cs typeface="Calibri" pitchFamily="34" charset="-120"/>
               </a:rPr>
-              <a:t>GLB・STL・DXF・SVG等を取り込み、Blenderとも連携する</a:t>
+              <a:t>プリセット・写真・記録からモデルを生成し、GLB・STL・DXF・SVGの取り込みと出力にも対応</a:t>
             </a:r>
             <a:endParaRPr lang="en-US" sz="1080" dirty="0"/>
           </a:p>
@@ -5847,7 +5847,7 @@
                 <a:ea typeface="Calibri" pitchFamily="34" charset="-122"/>
                 <a:cs typeface="Calibri" pitchFamily="34" charset="-120"/>
               </a:rPr>
-              <a:t>実画面：3D進捗管理（基本構造・写真から作成・図面取込・部材進捗・全体進捗）とBlender連携</a:t>
+              <a:t>実画面：3D進捗管理（基本構造・写真から作成・記録から作成・図面取込・部材進捗・全体進捗）とBlender連携</a:t>
             </a:r>
             <a:endParaRPr lang="en-US" sz="950" dirty="0"/>
           </a:p>

--- a/Project_Tree_プレゼン資料.pptx
+++ b/Project_Tree_プレゼン資料.pptx
@@ -4,6 +4,9 @@
   <p:sldMasterIdLst>
     <p:sldMasterId id="2147483648" r:id="rId1"/>
   </p:sldMasterIdLst>
+  <p:notesMasterIdLst>
+    <p:notesMasterId r:id="rId12"/>
+  </p:notesMasterIdLst>
   <p:sldIdLst>
     <p:sldId id="256" r:id="rId2"/>
     <p:sldId id="257" r:id="rId3"/>
@@ -16,9 +19,6 @@
     <p:sldId id="264" r:id="rId10"/>
     <p:sldId id="265" r:id="rId11"/>
   </p:sldIdLst>
-  <p:notesMasterIdLst>
-    <p:notesMasterId r:id="rId12"/>
-  </p:notesMasterIdLst>
   <p:sldSz cx="12192000" cy="6858000"/>
   <p:notesSz cx="6858000" cy="12192000"/>
   <p:defaultTextStyle>
@@ -113,6 +113,11 @@
       </a:defRPr>
     </a:lvl9pPr>
   </p:defaultTextStyle>
+  <p:extLst>
+    <p:ext uri="{EFAFB233-063F-42B5-8137-9DF3F51BA10A}">
+      <p15:sldGuideLst xmlns:p15="http://schemas.microsoft.com/office/powerpoint/2012/main"/>
+    </p:ext>
+  </p:extLst>
 </p:presentation>
 </file>
 
@@ -138,241 +143,17 @@
           <a:chExt cx="0" cy="0"/>
         </a:xfrm>
       </p:grpSpPr>
-      <p:sp>
-        <p:nvSpPr>
-          <p:cNvPr id="2" name="Header Placeholder 1"/>
-          <p:cNvSpPr>
-            <a:spLocks noGrp="1"/>
-          </p:cNvSpPr>
-          <p:nvPr>
-            <p:ph type="hdr" sz="quarter"/>
-          </p:nvPr>
-        </p:nvSpPr>
-        <p:spPr>
-          <a:xfrm>
-            <a:off x="0" y="0"/>
-            <a:ext cx="2971800" cy="458788"/>
-          </a:xfrm>
-          <a:prstGeom prst="rect">
-            <a:avLst/>
-          </a:prstGeom>
-        </p:spPr>
-        <p:txBody>
-          <a:bodyPr vert="horz" lIns="91440" tIns="45720" rIns="91440" bIns="45720" rtlCol="0"/>
-          <a:lstStyle>
-            <a:lvl1pPr algn="l">
-              <a:defRPr sz="1200"/>
-            </a:lvl1pPr>
-          </a:lstStyle>
-          <a:p>
-            <a:endParaRPr lang="en-US"/>
-          </a:p>
-        </p:txBody>
-      </p:sp>
-      <p:sp>
-        <p:nvSpPr>
-          <p:cNvPr id="3" name="Date Placeholder 2"/>
-          <p:cNvSpPr>
-            <a:spLocks noGrp="1"/>
-          </p:cNvSpPr>
-          <p:nvPr>
-            <p:ph type="dt" idx="1"/>
-          </p:nvPr>
-        </p:nvSpPr>
-        <p:spPr>
-          <a:xfrm>
-            <a:off x="3884613" y="0"/>
-            <a:ext cx="2971800" cy="458788"/>
-          </a:xfrm>
-          <a:prstGeom prst="rect">
-            <a:avLst/>
-          </a:prstGeom>
-        </p:spPr>
-        <p:txBody>
-          <a:bodyPr vert="horz" lIns="91440" tIns="45720" rIns="91440" bIns="45720" rtlCol="0"/>
-          <a:lstStyle>
-            <a:lvl1pPr algn="r">
-              <a:defRPr sz="1200"/>
-            </a:lvl1pPr>
-          </a:lstStyle>
-          <a:p>
-            <a:fld id="{5282F153-3F37-0F45-9E97-73ACFA13230C}" type="datetimeFigureOut">
-              <a:rPr lang="en-US"/>
-              <a:t>7/23/19</a:t>
-            </a:fld>
-            <a:endParaRPr lang="en-US"/>
-          </a:p>
-        </p:txBody>
-      </p:sp>
-      <p:sp>
-        <p:nvSpPr>
-          <p:cNvPr id="4" name="Slide Image Placeholder 3"/>
-          <p:cNvSpPr>
-            <a:spLocks noGrp="1" noRot="1" noChangeAspect="1"/>
-          </p:cNvSpPr>
-          <p:nvPr>
-            <p:ph type="sldImg" idx="2"/>
-          </p:nvPr>
-        </p:nvSpPr>
-        <p:spPr>
-          <a:xfrm>
-            <a:off x="685800" y="1143000"/>
-            <a:ext cx="5486400" cy="3086100"/>
-          </a:xfrm>
-          <a:prstGeom prst="rect">
-            <a:avLst/>
-          </a:prstGeom>
-          <a:noFill/>
-          <a:ln w="12700">
-            <a:solidFill>
-              <a:prstClr val="black"/>
-            </a:solidFill>
-          </a:ln>
-        </p:spPr>
-        <p:txBody>
-          <a:bodyPr vert="horz" lIns="91440" tIns="45720" rIns="91440" bIns="45720" rtlCol="0" anchor="ctr"/>
-          <a:lstStyle/>
-          <a:p>
-            <a:endParaRPr lang="en-US"/>
-          </a:p>
-        </p:txBody>
-      </p:sp>
-      <p:sp>
-        <p:nvSpPr>
-          <p:cNvPr id="5" name="Notes Placeholder 4"/>
-          <p:cNvSpPr>
-            <a:spLocks noGrp="1"/>
-          </p:cNvSpPr>
-          <p:nvPr>
-            <p:ph type="body" sz="quarter" idx="3"/>
-          </p:nvPr>
-        </p:nvSpPr>
-        <p:spPr>
-          <a:xfrm>
-            <a:off x="685800" y="4400550"/>
-            <a:ext cx="5486400" cy="3600450"/>
-          </a:xfrm>
-          <a:prstGeom prst="rect">
-            <a:avLst/>
-          </a:prstGeom>
-        </p:spPr>
-        <p:txBody>
-          <a:bodyPr vert="horz" lIns="91440" tIns="45720" rIns="91440" bIns="45720" rtlCol="0"/>
-          <a:lstStyle/>
-          <a:p>
-            <a:pPr lvl="0"/>
-            <a:r>
-              <a:rPr lang="en-US"/>
-              <a:t>Click to edit Master text styles</a:t>
-            </a:r>
-          </a:p>
-          <a:p>
-            <a:pPr lvl="1"/>
-            <a:r>
-              <a:rPr lang="en-US"/>
-              <a:t>Second level</a:t>
-            </a:r>
-          </a:p>
-          <a:p>
-            <a:pPr lvl="2"/>
-            <a:r>
-              <a:rPr lang="en-US"/>
-              <a:t>Third level</a:t>
-            </a:r>
-          </a:p>
-          <a:p>
-            <a:pPr lvl="3"/>
-            <a:r>
-              <a:rPr lang="en-US"/>
-              <a:t>Fourth level</a:t>
-            </a:r>
-          </a:p>
-          <a:p>
-            <a:pPr lvl="4"/>
-            <a:r>
-              <a:rPr lang="en-US"/>
-              <a:t>Fifth level</a:t>
-            </a:r>
-          </a:p>
-        </p:txBody>
-      </p:sp>
-      <p:sp>
-        <p:nvSpPr>
-          <p:cNvPr id="6" name="Footer Placeholder 5"/>
-          <p:cNvSpPr>
-            <a:spLocks noGrp="1"/>
-          </p:cNvSpPr>
-          <p:nvPr>
-            <p:ph type="ftr" sz="quarter" idx="4"/>
-          </p:nvPr>
-        </p:nvSpPr>
-        <p:spPr>
-          <a:xfrm>
-            <a:off x="0" y="8685213"/>
-            <a:ext cx="2971800" cy="458787"/>
-          </a:xfrm>
-          <a:prstGeom prst="rect">
-            <a:avLst/>
-          </a:prstGeom>
-        </p:spPr>
-        <p:txBody>
-          <a:bodyPr vert="horz" lIns="91440" tIns="45720" rIns="91440" bIns="45720" rtlCol="0" anchor="b"/>
-          <a:lstStyle>
-            <a:lvl1pPr algn="l">
-              <a:defRPr sz="1200"/>
-            </a:lvl1pPr>
-          </a:lstStyle>
-          <a:p>
-            <a:endParaRPr lang="en-US"/>
-          </a:p>
-        </p:txBody>
-      </p:sp>
-      <p:sp>
-        <p:nvSpPr>
-          <p:cNvPr id="7" name="Slide Number Placeholder 6"/>
-          <p:cNvSpPr>
-            <a:spLocks noGrp="1"/>
-          </p:cNvSpPr>
-          <p:nvPr>
-            <p:ph type="sldNum" sz="quarter" idx="5"/>
-          </p:nvPr>
-        </p:nvSpPr>
-        <p:spPr>
-          <a:xfrm>
-            <a:off x="3884613" y="8685213"/>
-            <a:ext cx="2971800" cy="458787"/>
-          </a:xfrm>
-          <a:prstGeom prst="rect">
-            <a:avLst/>
-          </a:prstGeom>
-        </p:spPr>
-        <p:txBody>
-          <a:bodyPr vert="horz" lIns="91440" tIns="45720" rIns="91440" bIns="45720" rtlCol="0" anchor="b"/>
-          <a:lstStyle>
-            <a:lvl1pPr algn="r">
-              <a:defRPr sz="1200"/>
-            </a:lvl1pPr>
-          </a:lstStyle>
-          <a:p>
-            <a:fld id="{CE5E9CC1-C706-0F49-92D6-E571CC5EEA8F}" type="slidenum">
-              <a:rPr lang="en-US"/>
-              <a:t>‹#›</a:t>
-            </a:fld>
-            <a:endParaRPr lang="en-US"/>
-          </a:p>
-        </p:txBody>
-      </p:sp>
     </p:spTree>
     <p:extLst>
       <p:ext uri="{BB962C8B-B14F-4D97-AF65-F5344CB8AC3E}">
-        <p14:creationId xmlns:p14="http://schemas.microsoft.com/office/powerpoint/2010/main" val="1024086991"/>
+        <p14:creationId xmlns:p14="http://schemas.microsoft.com/office/powerpoint/2010/main" val="1872547297"/>
       </p:ext>
     </p:extLst>
   </p:cSld>
   <p:clrMap bg1="lt1" tx1="dk1" bg2="lt2" tx2="dk2" accent1="accent1" accent2="accent2" accent3="accent3" accent4="accent4" accent5="accent5" accent6="accent6" hlink="hlink" folHlink="folHlink"/>
   <p:notesStyle>
     <a:lvl1pPr marL="0" algn="l" defTabSz="914400" rtl="0" eaLnBrk="1" latinLnBrk="0" hangingPunct="1">
-      <a:defRPr sz="1200" kern="1200">
+      <a:defRPr kumimoji="1" sz="1200" kern="1200">
         <a:solidFill>
           <a:schemeClr val="tx1"/>
         </a:solidFill>
@@ -382,7 +163,7 @@
       </a:defRPr>
     </a:lvl1pPr>
     <a:lvl2pPr marL="457200" algn="l" defTabSz="914400" rtl="0" eaLnBrk="1" latinLnBrk="0" hangingPunct="1">
-      <a:defRPr sz="1200" kern="1200">
+      <a:defRPr kumimoji="1" sz="1200" kern="1200">
         <a:solidFill>
           <a:schemeClr val="tx1"/>
         </a:solidFill>
@@ -392,7 +173,7 @@
       </a:defRPr>
     </a:lvl2pPr>
     <a:lvl3pPr marL="914400" algn="l" defTabSz="914400" rtl="0" eaLnBrk="1" latinLnBrk="0" hangingPunct="1">
-      <a:defRPr sz="1200" kern="1200">
+      <a:defRPr kumimoji="1" sz="1200" kern="1200">
         <a:solidFill>
           <a:schemeClr val="tx1"/>
         </a:solidFill>
@@ -402,7 +183,7 @@
       </a:defRPr>
     </a:lvl3pPr>
     <a:lvl4pPr marL="1371600" algn="l" defTabSz="914400" rtl="0" eaLnBrk="1" latinLnBrk="0" hangingPunct="1">
-      <a:defRPr sz="1200" kern="1200">
+      <a:defRPr kumimoji="1" sz="1200" kern="1200">
         <a:solidFill>
           <a:schemeClr val="tx1"/>
         </a:solidFill>
@@ -412,7 +193,7 @@
       </a:defRPr>
     </a:lvl4pPr>
     <a:lvl5pPr marL="1828800" algn="l" defTabSz="914400" rtl="0" eaLnBrk="1" latinLnBrk="0" hangingPunct="1">
-      <a:defRPr sz="1200" kern="1200">
+      <a:defRPr kumimoji="1" sz="1200" kern="1200">
         <a:solidFill>
           <a:schemeClr val="tx1"/>
         </a:solidFill>
@@ -422,7 +203,7 @@
       </a:defRPr>
     </a:lvl5pPr>
     <a:lvl6pPr marL="2286000" algn="l" defTabSz="914400" rtl="0" eaLnBrk="1" latinLnBrk="0" hangingPunct="1">
-      <a:defRPr sz="1200" kern="1200">
+      <a:defRPr kumimoji="1" sz="1200" kern="1200">
         <a:solidFill>
           <a:schemeClr val="tx1"/>
         </a:solidFill>
@@ -432,7 +213,7 @@
       </a:defRPr>
     </a:lvl6pPr>
     <a:lvl7pPr marL="2743200" algn="l" defTabSz="914400" rtl="0" eaLnBrk="1" latinLnBrk="0" hangingPunct="1">
-      <a:defRPr sz="1200" kern="1200">
+      <a:defRPr kumimoji="1" sz="1200" kern="1200">
         <a:solidFill>
           <a:schemeClr val="tx1"/>
         </a:solidFill>
@@ -442,7 +223,7 @@
       </a:defRPr>
     </a:lvl7pPr>
     <a:lvl8pPr marL="3200400" algn="l" defTabSz="914400" rtl="0" eaLnBrk="1" latinLnBrk="0" hangingPunct="1">
-      <a:defRPr sz="1200" kern="1200">
+      <a:defRPr kumimoji="1" sz="1200" kern="1200">
         <a:solidFill>
           <a:schemeClr val="tx1"/>
         </a:solidFill>
@@ -452,7 +233,7 @@
       </a:defRPr>
     </a:lvl8pPr>
     <a:lvl9pPr marL="3657600" algn="l" defTabSz="914400" rtl="0" eaLnBrk="1" latinLnBrk="0" hangingPunct="1">
-      <a:defRPr sz="1200" kern="1200">
+      <a:defRPr kumimoji="1" sz="1200" kern="1200">
         <a:solidFill>
           <a:schemeClr val="tx1"/>
         </a:solidFill>
@@ -513,7 +294,6 @@
               <a:rPr lang="en-US" dirty="0"/>
               <a:t>Project_Treeは、散在するプロジェクト情報を時系列と5段階のストーリーに整理し、資料用画像や2D・3Dモデルまで結び付けるアプリです。</a:t>
             </a:r>
-            <a:endParaRPr lang="en-US" dirty="0"/>
           </a:p>
         </p:txBody>
       </p:sp>
@@ -601,7 +381,6 @@
               <a:rPr lang="en-US" dirty="0"/>
               <a:t>「何でも自動化するアプリ」ではなく、事実と推論をつなぎ、説明可能な形で再利用する基盤として締める。</a:t>
             </a:r>
-            <a:endParaRPr lang="en-US" dirty="0"/>
           </a:p>
         </p:txBody>
       </p:sp>
@@ -685,10 +464,6 @@
           <a:bodyPr/>
           <a:lstStyle/>
           <a:p>
-            <a:r>
-              <a:rPr lang="en-US" dirty="0"/>
-              <a:t/>
-            </a:r>
             <a:endParaRPr lang="en-US" dirty="0"/>
           </a:p>
         </p:txBody>
@@ -773,10 +548,6 @@
           <a:bodyPr/>
           <a:lstStyle/>
           <a:p>
-            <a:r>
-              <a:rPr lang="en-US" dirty="0"/>
-              <a:t/>
-            </a:r>
             <a:endParaRPr lang="en-US" dirty="0"/>
           </a:p>
         </p:txBody>
@@ -861,10 +632,6 @@
           <a:bodyPr/>
           <a:lstStyle/>
           <a:p>
-            <a:r>
-              <a:rPr lang="en-US" dirty="0"/>
-              <a:t/>
-            </a:r>
             <a:endParaRPr lang="en-US" dirty="0"/>
           </a:p>
         </p:txBody>
@@ -949,10 +716,6 @@
           <a:bodyPr/>
           <a:lstStyle/>
           <a:p>
-            <a:r>
-              <a:rPr lang="en-US" dirty="0"/>
-              <a:t/>
-            </a:r>
             <a:endParaRPr lang="en-US" dirty="0"/>
           </a:p>
         </p:txBody>
@@ -1037,10 +800,6 @@
           <a:bodyPr/>
           <a:lstStyle/>
           <a:p>
-            <a:r>
-              <a:rPr lang="en-US" dirty="0"/>
-              <a:t/>
-            </a:r>
             <a:endParaRPr lang="en-US" dirty="0"/>
           </a:p>
         </p:txBody>
@@ -1125,10 +884,6 @@
           <a:bodyPr/>
           <a:lstStyle/>
           <a:p>
-            <a:r>
-              <a:rPr lang="en-US" dirty="0"/>
-              <a:t/>
-            </a:r>
             <a:endParaRPr lang="en-US" dirty="0"/>
           </a:p>
         </p:txBody>
@@ -1213,10 +968,6 @@
           <a:bodyPr/>
           <a:lstStyle/>
           <a:p>
-            <a:r>
-              <a:rPr lang="en-US" dirty="0"/>
-              <a:t/>
-            </a:r>
             <a:endParaRPr lang="en-US" dirty="0"/>
           </a:p>
         </p:txBody>
@@ -1301,10 +1052,6 @@
           <a:bodyPr/>
           <a:lstStyle/>
           <a:p>
-            <a:r>
-              <a:rPr lang="en-US" dirty="0"/>
-              <a:t/>
-            </a:r>
             <a:endParaRPr lang="en-US" dirty="0"/>
           </a:p>
         </p:txBody>
@@ -1378,6 +1125,11 @@
 <file path=ppt/slideMasters/slideMaster1.xml><?xml version="1.0" encoding="utf-8"?>
 <p:sldMaster xmlns:a="http://schemas.openxmlformats.org/drawingml/2006/main" xmlns:r="http://schemas.openxmlformats.org/officeDocument/2006/relationships" xmlns:p="http://schemas.openxmlformats.org/presentationml/2006/main">
   <p:cSld>
+    <p:bg>
+      <p:bgRef idx="1001">
+        <a:schemeClr val="bg1"/>
+      </p:bgRef>
+    </p:bg>
     <p:spTree>
       <p:nvGrpSpPr>
         <p:cNvPr id="1" name=""/>
@@ -1660,6 +1412,7 @@
         <a:solidFill>
           <a:srgbClr val="0E1830"/>
         </a:solidFill>
+        <a:effectLst/>
       </p:bgPr>
     </p:bg>
     <p:spTree>
@@ -1678,15 +1431,15 @@
       </p:grpSpPr>
       <p:pic>
         <p:nvPicPr>
-          <p:cNvPr id="2" name="Image 0" descr="C:\Users\ryoh0\AI\業務用\202604\AGENTS\202608LLM\clatest\assets\illust\thr_93a890f2b4e44783aa02_stage3_illust.png">    </p:cNvPr>
+          <p:cNvPr id="2" name="Image 0" descr="C:\Users\ryoh0\AI\業務用\202604\AGENTS\202608LLM\clatest\assets\illust\thr_93a890f2b4e44783aa02_stage3_illust.png"/>
           <p:cNvPicPr>
             <a:picLocks noChangeAspect="1"/>
           </p:cNvPicPr>
           <p:nvPr/>
         </p:nvPicPr>
         <p:blipFill>
-          <a:blip r:embed="rId1"/>
-          <a:srcRect l="0" r="0" t="0" b="0"/>
+          <a:blip r:embed="rId3"/>
+          <a:srcRect/>
           <a:stretch/>
         </p:blipFill>
         <p:spPr>
@@ -1742,11 +1495,11 @@
           <a:bodyPr wrap="square" rtlCol="0" anchor="ctr"/>
           <a:lstStyle/>
           <a:p>
-            <a:pPr indent="0" marL="0">
-              <a:buNone/>
-            </a:pPr>
-            <a:r>
-              <a:rPr lang="en-US" sz="1400" b="1" spc="300" kern="0" dirty="0">
+            <a:pPr marL="0" indent="0">
+              <a:buNone/>
+            </a:pPr>
+            <a:r>
+              <a:rPr lang="en-US" sz="1400" b="1" kern="0" spc="300" dirty="0">
                 <a:solidFill>
                   <a:srgbClr val="C0392B"/>
                 </a:solidFill>
@@ -1781,7 +1534,7 @@
           <a:bodyPr wrap="square" rtlCol="0" anchor="ctr"/>
           <a:lstStyle/>
           <a:p>
-            <a:pPr indent="0" marL="0">
+            <a:pPr marL="0" indent="0">
               <a:lnSpc>
                 <a:spcPts val="4400"/>
               </a:lnSpc>
@@ -1801,7 +1554,7 @@
             <a:endParaRPr lang="en-US" sz="3800" dirty="0"/>
           </a:p>
           <a:p>
-            <a:pPr indent="0" marL="0">
+            <a:pPr marL="0" indent="0">
               <a:lnSpc>
                 <a:spcPts val="4400"/>
               </a:lnSpc>
@@ -1843,7 +1596,7 @@
           <a:bodyPr wrap="square" rtlCol="0" anchor="ctr"/>
           <a:lstStyle/>
           <a:p>
-            <a:pPr indent="0" marL="0">
+            <a:pPr marL="0" indent="0">
               <a:buNone/>
             </a:pPr>
             <a:r>
@@ -1882,7 +1635,7 @@
           <a:bodyPr wrap="square" rtlCol="0" anchor="ctr"/>
           <a:lstStyle/>
           <a:p>
-            <a:pPr indent="0" marL="0">
+            <a:pPr marL="0" indent="0">
               <a:buNone/>
             </a:pPr>
             <a:r>
@@ -1916,6 +1669,7 @@
         <a:solidFill>
           <a:srgbClr val="0E1830"/>
         </a:solidFill>
+        <a:effectLst/>
       </p:bgPr>
     </p:bg>
     <p:spTree>
@@ -1934,14 +1688,14 @@
       </p:grpSpPr>
       <p:pic>
         <p:nvPicPr>
-          <p:cNvPr id="2" name="Image 0" descr="C:\Users\ryoh0\AI\業務用\202604\AGENTS\202608LLM\clatest\scratch_out\deck_shots\crop_full_revetment.png">    </p:cNvPr>
+          <p:cNvPr id="2" name="Image 0" descr="C:\Users\ryoh0\AI\業務用\202604\AGENTS\202608LLM\clatest\scratch_out\deck_shots\crop_full_revetment.png"/>
           <p:cNvPicPr>
             <a:picLocks noChangeAspect="1"/>
           </p:cNvPicPr>
           <p:nvPr/>
         </p:nvPicPr>
         <p:blipFill>
-          <a:blip r:embed="rId1"/>
+          <a:blip r:embed="rId3"/>
           <a:stretch>
             <a:fillRect/>
           </a:stretch>
@@ -2001,7 +1755,7 @@
           <a:bodyPr wrap="square" rtlCol="0" anchor="ctr"/>
           <a:lstStyle/>
           <a:p>
-            <a:pPr indent="0" marL="0">
+            <a:pPr marL="0" indent="0">
               <a:buNone/>
             </a:pPr>
             <a:r>
@@ -2040,7 +1794,7 @@
           <a:bodyPr wrap="square" rtlCol="0" anchor="ctr"/>
           <a:lstStyle/>
           <a:p>
-            <a:pPr indent="0" marL="0">
+            <a:pPr marL="0" indent="0">
               <a:lnSpc>
                 <a:spcPts val="4000"/>
               </a:lnSpc>
@@ -2060,7 +1814,7 @@
             <a:endParaRPr lang="en-US" sz="3300" dirty="0"/>
           </a:p>
           <a:p>
-            <a:pPr indent="0" marL="0">
+            <a:pPr marL="0" indent="0">
               <a:lnSpc>
                 <a:spcPts val="4000"/>
               </a:lnSpc>
@@ -2080,7 +1834,7 @@
             <a:endParaRPr lang="en-US" sz="3300" dirty="0"/>
           </a:p>
           <a:p>
-            <a:pPr indent="0" marL="0">
+            <a:pPr marL="0" indent="0">
               <a:lnSpc>
                 <a:spcPts val="4000"/>
               </a:lnSpc>
@@ -2149,7 +1903,7 @@
           <a:bodyPr wrap="square" rtlCol="0" anchor="ctr"/>
           <a:lstStyle/>
           <a:p>
-            <a:pPr indent="0" marL="0">
+            <a:pPr marL="0" indent="0">
               <a:lnSpc>
                 <a:spcPts val="1900"/>
               </a:lnSpc>
@@ -2169,7 +1923,7 @@
             <a:endParaRPr lang="en-US" sz="1300" dirty="0"/>
           </a:p>
           <a:p>
-            <a:pPr indent="0" marL="0">
+            <a:pPr marL="0" indent="0">
               <a:lnSpc>
                 <a:spcPts val="1900"/>
               </a:lnSpc>
@@ -2211,11 +1965,11 @@
           <a:bodyPr wrap="square" rtlCol="0" anchor="ctr"/>
           <a:lstStyle/>
           <a:p>
-            <a:pPr indent="0" marL="0">
-              <a:buNone/>
-            </a:pPr>
-            <a:r>
-              <a:rPr lang="en-US" sz="1100" b="1" spc="200" kern="0" dirty="0">
+            <a:pPr marL="0" indent="0">
+              <a:buNone/>
+            </a:pPr>
+            <a:r>
+              <a:rPr lang="en-US" sz="1100" b="1" kern="0" spc="200" dirty="0">
                 <a:solidFill>
                   <a:srgbClr val="7C8AA5"/>
                 </a:solidFill>
@@ -2245,6 +1999,7 @@
         <a:solidFill>
           <a:srgbClr val="FFFFFF"/>
         </a:solidFill>
+        <a:effectLst/>
       </p:bgPr>
     </p:bg>
     <p:spTree>
@@ -2282,11 +2037,11 @@
           <a:bodyPr wrap="square" rtlCol="0" anchor="ctr"/>
           <a:lstStyle/>
           <a:p>
-            <a:pPr indent="0" marL="0">
-              <a:buNone/>
-            </a:pPr>
-            <a:r>
-              <a:rPr lang="en-US" sz="1200" b="1" spc="200" kern="0" dirty="0">
+            <a:pPr marL="0" indent="0">
+              <a:buNone/>
+            </a:pPr>
+            <a:r>
+              <a:rPr lang="en-US" sz="1200" b="1" kern="0" spc="200" dirty="0">
                 <a:solidFill>
                   <a:srgbClr val="C0392B"/>
                 </a:solidFill>
@@ -2321,7 +2076,7 @@
           <a:bodyPr wrap="square" rtlCol="0" anchor="ctr"/>
           <a:lstStyle/>
           <a:p>
-            <a:pPr indent="0" marL="0">
+            <a:pPr marL="0" indent="0">
               <a:buNone/>
             </a:pPr>
             <a:r>
@@ -2360,7 +2115,7 @@
           <a:bodyPr wrap="square" rtlCol="0" anchor="ctr"/>
           <a:lstStyle/>
           <a:p>
-            <a:pPr indent="0" marL="0">
+            <a:pPr marL="0" indent="0">
               <a:buNone/>
             </a:pPr>
             <a:r>
@@ -2446,7 +2201,7 @@
           <a:bodyPr wrap="square" rtlCol="0" anchor="ctr"/>
           <a:lstStyle/>
           <a:p>
-            <a:pPr algn="ctr" indent="0" marL="0">
+            <a:pPr marL="0" indent="0" algn="ctr">
               <a:buNone/>
             </a:pPr>
             <a:r>
@@ -2485,7 +2240,7 @@
           <a:bodyPr wrap="square" rtlCol="0" anchor="ctr"/>
           <a:lstStyle/>
           <a:p>
-            <a:pPr indent="0" marL="0">
+            <a:pPr marL="0" indent="0">
               <a:buNone/>
             </a:pPr>
             <a:r>
@@ -2524,7 +2279,7 @@
           <a:bodyPr wrap="square" rtlCol="0" anchor="ctr"/>
           <a:lstStyle/>
           <a:p>
-            <a:pPr indent="0" marL="0">
+            <a:pPr marL="0" indent="0">
               <a:lnSpc>
                 <a:spcPts val="1700"/>
               </a:lnSpc>
@@ -2544,7 +2299,7 @@
             <a:endParaRPr lang="en-US" sz="1250" dirty="0"/>
           </a:p>
           <a:p>
-            <a:pPr indent="0" marL="0">
+            <a:pPr marL="0" indent="0">
               <a:lnSpc>
                 <a:spcPts val="1700"/>
               </a:lnSpc>
@@ -2633,7 +2388,7 @@
           <a:bodyPr wrap="square" rtlCol="0" anchor="ctr"/>
           <a:lstStyle/>
           <a:p>
-            <a:pPr algn="ctr" indent="0" marL="0">
+            <a:pPr marL="0" indent="0" algn="ctr">
               <a:buNone/>
             </a:pPr>
             <a:r>
@@ -2672,7 +2427,7 @@
           <a:bodyPr wrap="square" rtlCol="0" anchor="ctr"/>
           <a:lstStyle/>
           <a:p>
-            <a:pPr indent="0" marL="0">
+            <a:pPr marL="0" indent="0">
               <a:buNone/>
             </a:pPr>
             <a:r>
@@ -2711,7 +2466,7 @@
           <a:bodyPr wrap="square" rtlCol="0" anchor="ctr"/>
           <a:lstStyle/>
           <a:p>
-            <a:pPr indent="0" marL="0">
+            <a:pPr marL="0" indent="0">
               <a:lnSpc>
                 <a:spcPts val="1700"/>
               </a:lnSpc>
@@ -2731,7 +2486,7 @@
             <a:endParaRPr lang="en-US" sz="1250" dirty="0"/>
           </a:p>
           <a:p>
-            <a:pPr indent="0" marL="0">
+            <a:pPr marL="0" indent="0">
               <a:lnSpc>
                 <a:spcPts val="1700"/>
               </a:lnSpc>
@@ -2820,7 +2575,7 @@
           <a:bodyPr wrap="square" rtlCol="0" anchor="ctr"/>
           <a:lstStyle/>
           <a:p>
-            <a:pPr algn="ctr" indent="0" marL="0">
+            <a:pPr marL="0" indent="0" algn="ctr">
               <a:buNone/>
             </a:pPr>
             <a:r>
@@ -2859,7 +2614,7 @@
           <a:bodyPr wrap="square" rtlCol="0" anchor="ctr"/>
           <a:lstStyle/>
           <a:p>
-            <a:pPr indent="0" marL="0">
+            <a:pPr marL="0" indent="0">
               <a:buNone/>
             </a:pPr>
             <a:r>
@@ -2898,7 +2653,7 @@
           <a:bodyPr wrap="square" rtlCol="0" anchor="ctr"/>
           <a:lstStyle/>
           <a:p>
-            <a:pPr indent="0" marL="0">
+            <a:pPr marL="0" indent="0">
               <a:lnSpc>
                 <a:spcPts val="1700"/>
               </a:lnSpc>
@@ -2918,7 +2673,7 @@
             <a:endParaRPr lang="en-US" sz="1250" dirty="0"/>
           </a:p>
           <a:p>
-            <a:pPr indent="0" marL="0">
+            <a:pPr marL="0" indent="0">
               <a:lnSpc>
                 <a:spcPts val="1700"/>
               </a:lnSpc>
@@ -2960,7 +2715,7 @@
           <a:bodyPr wrap="square" rtlCol="0" anchor="ctr"/>
           <a:lstStyle/>
           <a:p>
-            <a:pPr indent="0" marL="0">
+            <a:pPr marL="0" indent="0">
               <a:buNone/>
             </a:pPr>
             <a:r>
@@ -3021,7 +2776,7 @@
           <a:bodyPr wrap="square" rtlCol="0" anchor="ctr"/>
           <a:lstStyle/>
           <a:p>
-            <a:pPr indent="0" marL="0">
+            <a:pPr marL="0" indent="0">
               <a:buNone/>
             </a:pPr>
             <a:r>
@@ -3060,7 +2815,7 @@
           <a:bodyPr wrap="square" rtlCol="0" anchor="ctr"/>
           <a:lstStyle/>
           <a:p>
-            <a:pPr algn="r" indent="0" marL="0">
+            <a:pPr marL="0" indent="0" algn="r">
               <a:buNone/>
             </a:pPr>
             <a:r>
@@ -3094,6 +2849,7 @@
         <a:solidFill>
           <a:srgbClr val="16233F"/>
         </a:solidFill>
+        <a:effectLst/>
       </p:bgPr>
     </p:bg>
     <p:spTree>
@@ -3131,11 +2887,11 @@
           <a:bodyPr wrap="square" rtlCol="0" anchor="ctr"/>
           <a:lstStyle/>
           <a:p>
-            <a:pPr indent="0" marL="0">
-              <a:buNone/>
-            </a:pPr>
-            <a:r>
-              <a:rPr lang="en-US" sz="1200" b="1" spc="200" kern="0" dirty="0">
+            <a:pPr marL="0" indent="0">
+              <a:buNone/>
+            </a:pPr>
+            <a:r>
+              <a:rPr lang="en-US" sz="1200" b="1" kern="0" spc="200" dirty="0">
                 <a:solidFill>
                   <a:srgbClr val="6FA8FF"/>
                 </a:solidFill>
@@ -3170,7 +2926,7 @@
           <a:bodyPr wrap="square" rtlCol="0" anchor="ctr"/>
           <a:lstStyle/>
           <a:p>
-            <a:pPr indent="0" marL="0">
+            <a:pPr marL="0" indent="0">
               <a:buNone/>
             </a:pPr>
             <a:r>
@@ -3187,7 +2943,7 @@
             <a:endParaRPr lang="en-US" sz="2700" dirty="0"/>
           </a:p>
           <a:p>
-            <a:pPr indent="0" marL="0">
+            <a:pPr marL="0" indent="0">
               <a:buNone/>
             </a:pPr>
             <a:r>
@@ -3226,7 +2982,7 @@
           <a:bodyPr wrap="square" rtlCol="0" anchor="ctr"/>
           <a:lstStyle/>
           <a:p>
-            <a:pPr indent="0" marL="0">
+            <a:pPr marL="0" indent="0">
               <a:lnSpc>
                 <a:spcPts val="1900"/>
               </a:lnSpc>
@@ -3288,7 +3044,7 @@
           <a:bodyPr wrap="square" rtlCol="0" anchor="ctr"/>
           <a:lstStyle/>
           <a:p>
-            <a:pPr indent="0" marL="0">
+            <a:pPr marL="0" indent="0">
               <a:lnSpc>
                 <a:spcPts val="1600"/>
               </a:lnSpc>
@@ -3350,7 +3106,7 @@
           <a:bodyPr wrap="square" rtlCol="0" anchor="ctr"/>
           <a:lstStyle/>
           <a:p>
-            <a:pPr indent="0" marL="0">
+            <a:pPr marL="0" indent="0">
               <a:lnSpc>
                 <a:spcPts val="1600"/>
               </a:lnSpc>
@@ -3412,7 +3168,7 @@
           <a:bodyPr wrap="square" rtlCol="0" anchor="ctr"/>
           <a:lstStyle/>
           <a:p>
-            <a:pPr indent="0" marL="0">
+            <a:pPr marL="0" indent="0">
               <a:lnSpc>
                 <a:spcPts val="1600"/>
               </a:lnSpc>
@@ -3474,7 +3230,7 @@
           <a:bodyPr wrap="square" rtlCol="0" anchor="ctr"/>
           <a:lstStyle/>
           <a:p>
-            <a:pPr indent="0" marL="0">
+            <a:pPr marL="0" indent="0">
               <a:lnSpc>
                 <a:spcPts val="1600"/>
               </a:lnSpc>
@@ -3490,126 +3246,6 @@
                 <a:cs typeface="Calibri" pitchFamily="34" charset="-120"/>
               </a:rPr>
               <a:t>文章だけでなく、資料用画像や2D・3Dモデルでも状況を伝える</a:t>
-            </a:r>
-            <a:endParaRPr lang="en-US" sz="1250" dirty="0"/>
-          </a:p>
-        </p:txBody>
-      </p:sp>
-      <p:sp>
-        <p:nvSpPr>
-          <p:cNvPr id="13" name="Shape 11"/>
-          <p:cNvSpPr/>
-          <p:nvPr/>
-        </p:nvSpPr>
-        <p:spPr>
-          <a:xfrm>
-            <a:off x="640080" y="5486400"/>
-            <a:ext cx="5715000" cy="960120"/>
-          </a:xfrm>
-          <a:prstGeom prst="roundRect">
-            <a:avLst>
-              <a:gd name="adj" fmla="val 7619"/>
-            </a:avLst>
-          </a:prstGeom>
-          <a:solidFill>
-            <a:srgbClr val="0E1830"/>
-          </a:solidFill>
-          <a:ln w="12700">
-            <a:solidFill>
-              <a:srgbClr val="3A4A6B"/>
-            </a:solidFill>
-            <a:prstDash val="solid"/>
-          </a:ln>
-        </p:spPr>
-      </p:sp>
-      <p:sp>
-        <p:nvSpPr>
-          <p:cNvPr id="14" name="Text 12"/>
-          <p:cNvSpPr/>
-          <p:nvPr/>
-        </p:nvSpPr>
-        <p:spPr>
-          <a:xfrm>
-            <a:off x="868680" y="5486400"/>
-            <a:ext cx="5303520" cy="960120"/>
-          </a:xfrm>
-          <a:prstGeom prst="rect">
-            <a:avLst/>
-          </a:prstGeom>
-          <a:noFill/>
-          <a:ln/>
-        </p:spPr>
-        <p:txBody>
-          <a:bodyPr wrap="square" rtlCol="0" anchor="ctr"/>
-          <a:lstStyle/>
-          <a:p>
-            <a:pPr indent="0" marL="0">
-              <a:lnSpc>
-                <a:spcPts val="1700"/>
-              </a:lnSpc>
-              <a:buNone/>
-            </a:pPr>
-            <a:r>
-              <a:rPr lang="en-US" sz="1250" b="1" dirty="0">
-                <a:solidFill>
-                  <a:srgbClr val="6FA8FF"/>
-                </a:solidFill>
-                <a:latin typeface="Calibri" pitchFamily="34" charset="0"/>
-                <a:ea typeface="Calibri" pitchFamily="34" charset="-122"/>
-                <a:cs typeface="Calibri" pitchFamily="34" charset="-120"/>
-              </a:rPr>
-              <a:t>業務確定台帳</a:t>
-            </a:r>
-            <a:pPr indent="0" marL="0">
-              <a:lnSpc>
-                <a:spcPts val="1700"/>
-              </a:lnSpc>
-              <a:buNone/>
-            </a:pPr>
-            <a:r>
-              <a:rPr lang="en-US" sz="1250" dirty="0">
-                <a:solidFill>
-                  <a:srgbClr val="E7ECF7"/>
-                </a:solidFill>
-                <a:latin typeface="Calibri" pitchFamily="34" charset="0"/>
-                <a:ea typeface="Calibri" pitchFamily="34" charset="-122"/>
-                <a:cs typeface="Calibri" pitchFamily="34" charset="-120"/>
-              </a:rPr>
-              <a:t>の「根拠が残る時系列」と、</a:t>
-            </a:r>
-            <a:pPr indent="0" marL="0">
-              <a:lnSpc>
-                <a:spcPts val="1700"/>
-              </a:lnSpc>
-              <a:buNone/>
-            </a:pPr>
-            <a:r>
-              <a:rPr lang="en-US" sz="1250" b="1" dirty="0">
-                <a:solidFill>
-                  <a:srgbClr val="6FA8FF"/>
-                </a:solidFill>
-                <a:latin typeface="Calibri" pitchFamily="34" charset="0"/>
-                <a:ea typeface="Calibri" pitchFamily="34" charset="-122"/>
-                <a:cs typeface="Calibri" pitchFamily="34" charset="-120"/>
-              </a:rPr>
-              <a:t>3D進捗管理</a:t>
-            </a:r>
-            <a:pPr indent="0" marL="0">
-              <a:lnSpc>
-                <a:spcPts val="1700"/>
-              </a:lnSpc>
-              <a:buNone/>
-            </a:pPr>
-            <a:r>
-              <a:rPr lang="en-US" sz="1250" dirty="0">
-                <a:solidFill>
-                  <a:srgbClr val="E7ECF7"/>
-                </a:solidFill>
-                <a:latin typeface="Calibri" pitchFamily="34" charset="0"/>
-                <a:ea typeface="Calibri" pitchFamily="34" charset="-122"/>
-                <a:cs typeface="Calibri" pitchFamily="34" charset="-120"/>
-              </a:rPr>
-              <a:t>の「直感的な可視化」を統合</a:t>
             </a:r>
             <a:endParaRPr lang="en-US" sz="1250" dirty="0"/>
           </a:p>
@@ -3641,7 +3277,7 @@
             <a:prstDash val="solid"/>
           </a:ln>
           <a:effectLst>
-            <a:outerShdw sx="100000" sy="100000" kx="0" ky="0" algn="bl" rotWithShape="0" blurRad="127000" dist="50800" dir="5400000">
+            <a:outerShdw blurRad="127000" dist="50800" dir="5400000" algn="bl" rotWithShape="0">
               <a:srgbClr val="000000">
                 <a:alpha val="45000"/>
               </a:srgbClr>
@@ -3651,14 +3287,14 @@
       </p:sp>
       <p:pic>
         <p:nvPicPr>
-          <p:cNvPr id="16" name="Image 0" descr="C:\Users\ryoh0\AI\業務用\202604\AGENTS\202608LLM\clatest\scratch_out\deck_shots\crop_timeline_right.png">    </p:cNvPr>
+          <p:cNvPr id="16" name="Image 0" descr="C:\Users\ryoh0\AI\業務用\202604\AGENTS\202608LLM\clatest\scratch_out\deck_shots\crop_timeline_right.png"/>
           <p:cNvPicPr>
             <a:picLocks noChangeAspect="1"/>
           </p:cNvPicPr>
           <p:nvPr/>
         </p:nvPicPr>
         <p:blipFill>
-          <a:blip r:embed="rId1"/>
+          <a:blip r:embed="rId3"/>
           <a:stretch>
             <a:fillRect/>
           </a:stretch>
@@ -3694,7 +3330,7 @@
           <a:bodyPr wrap="square" rtlCol="0" anchor="ctr"/>
           <a:lstStyle/>
           <a:p>
-            <a:pPr algn="ctr" indent="0" marL="0">
+            <a:pPr marL="0" indent="0" algn="ctr">
               <a:buNone/>
             </a:pPr>
             <a:r>
@@ -3733,7 +3369,7 @@
           <a:bodyPr wrap="square" rtlCol="0" anchor="ctr"/>
           <a:lstStyle/>
           <a:p>
-            <a:pPr algn="r" indent="0" marL="0">
+            <a:pPr marL="0" indent="0" algn="r">
               <a:buNone/>
             </a:pPr>
             <a:r>
@@ -3767,6 +3403,7 @@
         <a:solidFill>
           <a:srgbClr val="FFFFFF"/>
         </a:solidFill>
+        <a:effectLst/>
       </p:bgPr>
     </p:bg>
     <p:spTree>
@@ -3804,11 +3441,11 @@
           <a:bodyPr wrap="square" rtlCol="0" anchor="ctr"/>
           <a:lstStyle/>
           <a:p>
-            <a:pPr indent="0" marL="0">
-              <a:buNone/>
-            </a:pPr>
-            <a:r>
-              <a:rPr lang="en-US" sz="1200" b="1" spc="200" kern="0" dirty="0">
+            <a:pPr marL="0" indent="0">
+              <a:buNone/>
+            </a:pPr>
+            <a:r>
+              <a:rPr lang="en-US" sz="1200" b="1" kern="0" spc="200" dirty="0">
                 <a:solidFill>
                   <a:srgbClr val="C0392B"/>
                 </a:solidFill>
@@ -3843,7 +3480,7 @@
           <a:bodyPr wrap="square" rtlCol="0" anchor="ctr"/>
           <a:lstStyle/>
           <a:p>
-            <a:pPr indent="0" marL="0">
+            <a:pPr marL="0" indent="0">
               <a:buNone/>
             </a:pPr>
             <a:r>
@@ -3904,7 +3541,7 @@
           <a:bodyPr wrap="square" rtlCol="0" anchor="ctr"/>
           <a:lstStyle/>
           <a:p>
-            <a:pPr indent="0" marL="0">
+            <a:pPr marL="0" indent="0">
               <a:buNone/>
             </a:pPr>
             <a:r>
@@ -3943,7 +3580,7 @@
           <a:bodyPr wrap="square" rtlCol="0" anchor="ctr"/>
           <a:lstStyle/>
           <a:p>
-            <a:pPr indent="0" marL="0">
+            <a:pPr marL="0" indent="0">
               <a:buNone/>
             </a:pPr>
             <a:r>
@@ -3982,7 +3619,7 @@
           <a:bodyPr wrap="square" rtlCol="0" anchor="ctr"/>
           <a:lstStyle/>
           <a:p>
-            <a:pPr indent="0" marL="0">
+            <a:pPr marL="0" indent="0">
               <a:lnSpc>
                 <a:spcPts val="1100"/>
               </a:lnSpc>
@@ -4002,7 +3639,7 @@
             <a:endParaRPr lang="en-US" sz="870" dirty="0"/>
           </a:p>
           <a:p>
-            <a:pPr indent="0" marL="0">
+            <a:pPr marL="0" indent="0">
               <a:lnSpc>
                 <a:spcPts val="1100"/>
               </a:lnSpc>
@@ -4044,7 +3681,7 @@
           <a:bodyPr wrap="square" rtlCol="0" anchor="ctr"/>
           <a:lstStyle/>
           <a:p>
-            <a:pPr algn="ctr" indent="0" marL="0">
+            <a:pPr marL="0" indent="0" algn="ctr">
               <a:buNone/>
             </a:pPr>
             <a:r>
@@ -4105,7 +3742,7 @@
           <a:bodyPr wrap="square" rtlCol="0" anchor="ctr"/>
           <a:lstStyle/>
           <a:p>
-            <a:pPr indent="0" marL="0">
+            <a:pPr marL="0" indent="0">
               <a:buNone/>
             </a:pPr>
             <a:r>
@@ -4144,7 +3781,7 @@
           <a:bodyPr wrap="square" rtlCol="0" anchor="ctr"/>
           <a:lstStyle/>
           <a:p>
-            <a:pPr indent="0" marL="0">
+            <a:pPr marL="0" indent="0">
               <a:buNone/>
             </a:pPr>
             <a:r>
@@ -4183,7 +3820,7 @@
           <a:bodyPr wrap="square" rtlCol="0" anchor="ctr"/>
           <a:lstStyle/>
           <a:p>
-            <a:pPr indent="0" marL="0">
+            <a:pPr marL="0" indent="0">
               <a:lnSpc>
                 <a:spcPts val="1100"/>
               </a:lnSpc>
@@ -4203,7 +3840,7 @@
             <a:endParaRPr lang="en-US" sz="870" dirty="0"/>
           </a:p>
           <a:p>
-            <a:pPr indent="0" marL="0">
+            <a:pPr marL="0" indent="0">
               <a:lnSpc>
                 <a:spcPts val="1100"/>
               </a:lnSpc>
@@ -4245,7 +3882,7 @@
           <a:bodyPr wrap="square" rtlCol="0" anchor="ctr"/>
           <a:lstStyle/>
           <a:p>
-            <a:pPr algn="ctr" indent="0" marL="0">
+            <a:pPr marL="0" indent="0" algn="ctr">
               <a:buNone/>
             </a:pPr>
             <a:r>
@@ -4306,7 +3943,7 @@
           <a:bodyPr wrap="square" rtlCol="0" anchor="ctr"/>
           <a:lstStyle/>
           <a:p>
-            <a:pPr indent="0" marL="0">
+            <a:pPr marL="0" indent="0">
               <a:buNone/>
             </a:pPr>
             <a:r>
@@ -4345,7 +3982,7 @@
           <a:bodyPr wrap="square" rtlCol="0" anchor="ctr"/>
           <a:lstStyle/>
           <a:p>
-            <a:pPr indent="0" marL="0">
+            <a:pPr marL="0" indent="0">
               <a:buNone/>
             </a:pPr>
             <a:r>
@@ -4384,7 +4021,7 @@
           <a:bodyPr wrap="square" rtlCol="0" anchor="ctr"/>
           <a:lstStyle/>
           <a:p>
-            <a:pPr indent="0" marL="0">
+            <a:pPr marL="0" indent="0">
               <a:lnSpc>
                 <a:spcPts val="1100"/>
               </a:lnSpc>
@@ -4404,7 +4041,7 @@
             <a:endParaRPr lang="en-US" sz="870" dirty="0"/>
           </a:p>
           <a:p>
-            <a:pPr indent="0" marL="0">
+            <a:pPr marL="0" indent="0">
               <a:lnSpc>
                 <a:spcPts val="1100"/>
               </a:lnSpc>
@@ -4446,7 +4083,7 @@
           <a:bodyPr wrap="square" rtlCol="0" anchor="ctr"/>
           <a:lstStyle/>
           <a:p>
-            <a:pPr algn="ctr" indent="0" marL="0">
+            <a:pPr marL="0" indent="0" algn="ctr">
               <a:buNone/>
             </a:pPr>
             <a:r>
@@ -4507,7 +4144,7 @@
           <a:bodyPr wrap="square" rtlCol="0" anchor="ctr"/>
           <a:lstStyle/>
           <a:p>
-            <a:pPr indent="0" marL="0">
+            <a:pPr marL="0" indent="0">
               <a:buNone/>
             </a:pPr>
             <a:r>
@@ -4546,7 +4183,7 @@
           <a:bodyPr wrap="square" rtlCol="0" anchor="ctr"/>
           <a:lstStyle/>
           <a:p>
-            <a:pPr indent="0" marL="0">
+            <a:pPr marL="0" indent="0">
               <a:buNone/>
             </a:pPr>
             <a:r>
@@ -4585,7 +4222,7 @@
           <a:bodyPr wrap="square" rtlCol="0" anchor="ctr"/>
           <a:lstStyle/>
           <a:p>
-            <a:pPr indent="0" marL="0">
+            <a:pPr marL="0" indent="0">
               <a:lnSpc>
                 <a:spcPts val="1100"/>
               </a:lnSpc>
@@ -4605,7 +4242,7 @@
             <a:endParaRPr lang="en-US" sz="870" dirty="0"/>
           </a:p>
           <a:p>
-            <a:pPr indent="0" marL="0">
+            <a:pPr marL="0" indent="0">
               <a:lnSpc>
                 <a:spcPts val="1100"/>
               </a:lnSpc>
@@ -4647,7 +4284,7 @@
           <a:bodyPr wrap="square" rtlCol="0" anchor="ctr"/>
           <a:lstStyle/>
           <a:p>
-            <a:pPr algn="ctr" indent="0" marL="0">
+            <a:pPr marL="0" indent="0" algn="ctr">
               <a:buNone/>
             </a:pPr>
             <a:r>
@@ -4708,7 +4345,7 @@
           <a:bodyPr wrap="square" rtlCol="0" anchor="ctr"/>
           <a:lstStyle/>
           <a:p>
-            <a:pPr indent="0" marL="0">
+            <a:pPr marL="0" indent="0">
               <a:buNone/>
             </a:pPr>
             <a:r>
@@ -4747,7 +4384,7 @@
           <a:bodyPr wrap="square" rtlCol="0" anchor="ctr"/>
           <a:lstStyle/>
           <a:p>
-            <a:pPr indent="0" marL="0">
+            <a:pPr marL="0" indent="0">
               <a:buNone/>
             </a:pPr>
             <a:r>
@@ -4786,7 +4423,7 @@
           <a:bodyPr wrap="square" rtlCol="0" anchor="ctr"/>
           <a:lstStyle/>
           <a:p>
-            <a:pPr indent="0" marL="0">
+            <a:pPr marL="0" indent="0">
               <a:lnSpc>
                 <a:spcPts val="1100"/>
               </a:lnSpc>
@@ -4806,7 +4443,7 @@
             <a:endParaRPr lang="en-US" sz="870" dirty="0"/>
           </a:p>
           <a:p>
-            <a:pPr indent="0" marL="0">
+            <a:pPr marL="0" indent="0">
               <a:lnSpc>
                 <a:spcPts val="1100"/>
               </a:lnSpc>
@@ -4848,7 +4485,7 @@
           <a:bodyPr wrap="square" rtlCol="0" anchor="ctr"/>
           <a:lstStyle/>
           <a:p>
-            <a:pPr indent="0" marL="0">
+            <a:pPr marL="0" indent="0">
               <a:buNone/>
             </a:pPr>
             <a:r>
@@ -4892,7 +4529,7 @@
             <a:prstDash val="solid"/>
           </a:ln>
           <a:effectLst>
-            <a:outerShdw sx="100000" sy="100000" kx="0" ky="0" algn="bl" rotWithShape="0" blurRad="127000" dist="50800" dir="5400000">
+            <a:outerShdw blurRad="127000" dist="50800" dir="5400000" algn="bl" rotWithShape="0">
               <a:srgbClr val="000000">
                 <a:alpha val="45000"/>
               </a:srgbClr>
@@ -4902,14 +4539,14 @@
       </p:sp>
       <p:pic>
         <p:nvPicPr>
-          <p:cNvPr id="30" name="Image 0" descr="C:\Users\ryoh0\AI\業務用\202604\AGENTS\202608LLM\clatest\scratch_out\deck_shots\crop_stagecards_bridge.png">    </p:cNvPr>
+          <p:cNvPr id="30" name="Image 0" descr="C:\Users\ryoh0\AI\業務用\202604\AGENTS\202608LLM\clatest\scratch_out\deck_shots\crop_stagecards_bridge.png"/>
           <p:cNvPicPr>
             <a:picLocks noChangeAspect="1"/>
           </p:cNvPicPr>
           <p:nvPr/>
         </p:nvPicPr>
         <p:blipFill>
-          <a:blip r:embed="rId1"/>
+          <a:blip r:embed="rId3"/>
           <a:stretch>
             <a:fillRect/>
           </a:stretch>
@@ -4945,7 +4582,7 @@
           <a:bodyPr wrap="square" rtlCol="0" anchor="ctr"/>
           <a:lstStyle/>
           <a:p>
-            <a:pPr indent="0" marL="0">
+            <a:pPr marL="0" indent="0">
               <a:buNone/>
             </a:pPr>
             <a:r>
@@ -4984,7 +4621,7 @@
           <a:bodyPr wrap="square" rtlCol="0" anchor="ctr"/>
           <a:lstStyle/>
           <a:p>
-            <a:pPr algn="r" indent="0" marL="0">
+            <a:pPr marL="0" indent="0" algn="r">
               <a:buNone/>
             </a:pPr>
             <a:r>
@@ -5018,6 +4655,7 @@
         <a:solidFill>
           <a:srgbClr val="FFFFFF"/>
         </a:solidFill>
+        <a:effectLst/>
       </p:bgPr>
     </p:bg>
     <p:spTree>
@@ -5055,11 +4693,11 @@
           <a:bodyPr wrap="square" rtlCol="0" anchor="ctr"/>
           <a:lstStyle/>
           <a:p>
-            <a:pPr indent="0" marL="0">
-              <a:buNone/>
-            </a:pPr>
-            <a:r>
-              <a:rPr lang="en-US" sz="1200" b="1" spc="200" kern="0" dirty="0">
+            <a:pPr marL="0" indent="0">
+              <a:buNone/>
+            </a:pPr>
+            <a:r>
+              <a:rPr lang="en-US" sz="1200" b="1" kern="0" spc="200" dirty="0">
                 <a:solidFill>
                   <a:srgbClr val="C0392B"/>
                 </a:solidFill>
@@ -5094,7 +4732,7 @@
           <a:bodyPr wrap="square" rtlCol="0" anchor="ctr"/>
           <a:lstStyle/>
           <a:p>
-            <a:pPr indent="0" marL="0">
+            <a:pPr marL="0" indent="0">
               <a:buNone/>
             </a:pPr>
             <a:r>
@@ -5155,7 +4793,7 @@
           <a:bodyPr wrap="square" rtlCol="0" anchor="ctr"/>
           <a:lstStyle/>
           <a:p>
-            <a:pPr indent="0" marL="0">
+            <a:pPr marL="0" indent="0">
               <a:buNone/>
             </a:pPr>
             <a:r>
@@ -5194,7 +4832,7 @@
           <a:bodyPr wrap="square" rtlCol="0" anchor="ctr"/>
           <a:lstStyle/>
           <a:p>
-            <a:pPr indent="0" marL="0">
+            <a:pPr marL="0" indent="0">
               <a:lnSpc>
                 <a:spcPts val="1300"/>
               </a:lnSpc>
@@ -5258,7 +4896,7 @@
           <a:bodyPr wrap="square" rtlCol="0" anchor="ctr"/>
           <a:lstStyle/>
           <a:p>
-            <a:pPr indent="0" marL="0">
+            <a:pPr marL="0" indent="0">
               <a:buNone/>
             </a:pPr>
             <a:r>
@@ -5297,7 +4935,7 @@
           <a:bodyPr wrap="square" rtlCol="0" anchor="ctr"/>
           <a:lstStyle/>
           <a:p>
-            <a:pPr indent="0" marL="0">
+            <a:pPr marL="0" indent="0">
               <a:lnSpc>
                 <a:spcPts val="1300"/>
               </a:lnSpc>
@@ -5361,7 +4999,7 @@
           <a:bodyPr wrap="square" rtlCol="0" anchor="ctr"/>
           <a:lstStyle/>
           <a:p>
-            <a:pPr indent="0" marL="0">
+            <a:pPr marL="0" indent="0">
               <a:buNone/>
             </a:pPr>
             <a:r>
@@ -5400,7 +5038,7 @@
           <a:bodyPr wrap="square" rtlCol="0" anchor="ctr"/>
           <a:lstStyle/>
           <a:p>
-            <a:pPr indent="0" marL="0">
+            <a:pPr marL="0" indent="0">
               <a:lnSpc>
                 <a:spcPts val="1300"/>
               </a:lnSpc>
@@ -5464,7 +5102,7 @@
           <a:bodyPr wrap="square" rtlCol="0" anchor="ctr"/>
           <a:lstStyle/>
           <a:p>
-            <a:pPr indent="0" marL="0">
+            <a:pPr marL="0" indent="0">
               <a:buNone/>
             </a:pPr>
             <a:r>
@@ -5503,7 +5141,7 @@
           <a:bodyPr wrap="square" rtlCol="0" anchor="ctr"/>
           <a:lstStyle/>
           <a:p>
-            <a:pPr indent="0" marL="0">
+            <a:pPr marL="0" indent="0">
               <a:lnSpc>
                 <a:spcPts val="1300"/>
               </a:lnSpc>
@@ -5567,7 +5205,7 @@
           <a:bodyPr wrap="square" rtlCol="0" anchor="ctr"/>
           <a:lstStyle/>
           <a:p>
-            <a:pPr indent="0" marL="0">
+            <a:pPr marL="0" indent="0">
               <a:buNone/>
             </a:pPr>
             <a:r>
@@ -5606,7 +5244,7 @@
           <a:bodyPr wrap="square" rtlCol="0" anchor="ctr"/>
           <a:lstStyle/>
           <a:p>
-            <a:pPr indent="0" marL="0">
+            <a:pPr marL="0" indent="0">
               <a:lnSpc>
                 <a:spcPts val="1300"/>
               </a:lnSpc>
@@ -5670,7 +5308,7 @@
           <a:bodyPr wrap="square" rtlCol="0" anchor="ctr"/>
           <a:lstStyle/>
           <a:p>
-            <a:pPr indent="0" marL="0">
+            <a:pPr marL="0" indent="0">
               <a:buNone/>
             </a:pPr>
             <a:r>
@@ -5709,7 +5347,7 @@
           <a:bodyPr wrap="square" rtlCol="0" anchor="ctr"/>
           <a:lstStyle/>
           <a:p>
-            <a:pPr indent="0" marL="0">
+            <a:pPr marL="0" indent="0">
               <a:lnSpc>
                 <a:spcPts val="1300"/>
               </a:lnSpc>
@@ -5779,7 +5417,7 @@
             <a:prstDash val="solid"/>
           </a:ln>
           <a:effectLst>
-            <a:outerShdw sx="100000" sy="100000" kx="0" ky="0" algn="bl" rotWithShape="0" blurRad="127000" dist="50800" dir="5400000">
+            <a:outerShdw blurRad="127000" dist="50800" dir="5400000" algn="bl" rotWithShape="0">
               <a:srgbClr val="000000">
                 <a:alpha val="45000"/>
               </a:srgbClr>
@@ -5789,14 +5427,14 @@
       </p:sp>
       <p:pic>
         <p:nvPicPr>
-          <p:cNvPr id="24" name="Image 0" descr="C:\Users\ryoh0\AI\業務用\202604\AGENTS\202608LLM\clatest\scratch_out\deck_shots\crop_progress_panel.png">    </p:cNvPr>
+          <p:cNvPr id="24" name="Image 0" descr="C:\Users\ryoh0\AI\業務用\202604\AGENTS\202608LLM\clatest\scratch_out\deck_shots\crop_progress_panel.png"/>
           <p:cNvPicPr>
             <a:picLocks noChangeAspect="1"/>
           </p:cNvPicPr>
           <p:nvPr/>
         </p:nvPicPr>
         <p:blipFill>
-          <a:blip r:embed="rId1"/>
+          <a:blip r:embed="rId3"/>
           <a:stretch>
             <a:fillRect/>
           </a:stretch>
@@ -5832,7 +5470,7 @@
           <a:bodyPr wrap="square" rtlCol="0" anchor="ctr"/>
           <a:lstStyle/>
           <a:p>
-            <a:pPr indent="0" marL="0">
+            <a:pPr marL="0" indent="0">
               <a:lnSpc>
                 <a:spcPts val="1200"/>
               </a:lnSpc>
@@ -5874,7 +5512,7 @@
           <a:bodyPr wrap="square" rtlCol="0" anchor="ctr"/>
           <a:lstStyle/>
           <a:p>
-            <a:pPr indent="0" marL="0">
+            <a:pPr marL="0" indent="0">
               <a:lnSpc>
                 <a:spcPts val="1700"/>
               </a:lnSpc>
@@ -5894,7 +5532,7 @@
             <a:endParaRPr lang="en-US" sz="1150" dirty="0"/>
           </a:p>
           <a:p>
-            <a:pPr indent="0" marL="0">
+            <a:pPr marL="0" indent="0">
               <a:lnSpc>
                 <a:spcPts val="1700"/>
               </a:lnSpc>
@@ -5936,7 +5574,7 @@
           <a:bodyPr wrap="square" rtlCol="0" anchor="ctr"/>
           <a:lstStyle/>
           <a:p>
-            <a:pPr algn="r" indent="0" marL="0">
+            <a:pPr marL="0" indent="0" algn="r">
               <a:buNone/>
             </a:pPr>
             <a:r>
@@ -5970,6 +5608,7 @@
         <a:solidFill>
           <a:srgbClr val="EAF2FB"/>
         </a:solidFill>
+        <a:effectLst/>
       </p:bgPr>
     </p:bg>
     <p:spTree>
@@ -6007,11 +5646,11 @@
           <a:bodyPr wrap="square" rtlCol="0" anchor="ctr"/>
           <a:lstStyle/>
           <a:p>
-            <a:pPr indent="0" marL="0">
-              <a:buNone/>
-            </a:pPr>
-            <a:r>
-              <a:rPr lang="en-US" sz="1200" b="1" spc="200" kern="0" dirty="0">
+            <a:pPr marL="0" indent="0">
+              <a:buNone/>
+            </a:pPr>
+            <a:r>
+              <a:rPr lang="en-US" sz="1200" b="1" kern="0" spc="200" dirty="0">
                 <a:solidFill>
                   <a:srgbClr val="C0392B"/>
                 </a:solidFill>
@@ -6046,7 +5685,7 @@
           <a:bodyPr wrap="square" rtlCol="0" anchor="ctr"/>
           <a:lstStyle/>
           <a:p>
-            <a:pPr indent="0" marL="0">
+            <a:pPr marL="0" indent="0">
               <a:buNone/>
             </a:pPr>
             <a:r>
@@ -6112,7 +5751,7 @@
           <a:bodyPr wrap="square" rtlCol="0" anchor="ctr"/>
           <a:lstStyle/>
           <a:p>
-            <a:pPr indent="0" marL="0">
+            <a:pPr marL="0" indent="0">
               <a:buNone/>
             </a:pPr>
             <a:r>
@@ -6173,7 +5812,7 @@
           <a:bodyPr wrap="square" rtlCol="0" anchor="ctr"/>
           <a:lstStyle/>
           <a:p>
-            <a:pPr indent="0" marL="0">
+            <a:pPr marL="0" indent="0">
               <a:buNone/>
             </a:pPr>
             <a:r>
@@ -6212,7 +5851,7 @@
           <a:bodyPr wrap="square" rtlCol="0" anchor="ctr"/>
           <a:lstStyle/>
           <a:p>
-            <a:pPr indent="0" marL="0">
+            <a:pPr marL="0" indent="0">
               <a:lnSpc>
                 <a:spcPts val="1400"/>
               </a:lnSpc>
@@ -6254,7 +5893,7 @@
           <a:bodyPr wrap="square" rtlCol="0" anchor="ctr"/>
           <a:lstStyle/>
           <a:p>
-            <a:pPr indent="0" marL="0">
+            <a:pPr marL="0" indent="0">
               <a:lnSpc>
                 <a:spcPts val="1400"/>
               </a:lnSpc>
@@ -6296,7 +5935,7 @@
           <a:bodyPr wrap="square" rtlCol="0" anchor="ctr"/>
           <a:lstStyle/>
           <a:p>
-            <a:pPr indent="0" marL="0">
+            <a:pPr marL="0" indent="0">
               <a:lnSpc>
                 <a:spcPts val="1400"/>
               </a:lnSpc>
@@ -6338,7 +5977,7 @@
           <a:bodyPr wrap="square" rtlCol="0" anchor="ctr"/>
           <a:lstStyle/>
           <a:p>
-            <a:pPr indent="0" marL="0">
+            <a:pPr marL="0" indent="0">
               <a:lnSpc>
                 <a:spcPts val="1400"/>
               </a:lnSpc>
@@ -6380,7 +6019,7 @@
           <a:bodyPr wrap="square" rtlCol="0" anchor="ctr"/>
           <a:lstStyle/>
           <a:p>
-            <a:pPr indent="0" marL="0">
+            <a:pPr marL="0" indent="0">
               <a:lnSpc>
                 <a:spcPts val="1400"/>
               </a:lnSpc>
@@ -6422,7 +6061,7 @@
           <a:bodyPr wrap="square" rtlCol="0" anchor="ctr"/>
           <a:lstStyle/>
           <a:p>
-            <a:pPr indent="0" marL="0">
+            <a:pPr marL="0" indent="0">
               <a:lnSpc>
                 <a:spcPts val="1400"/>
               </a:lnSpc>
@@ -6464,7 +6103,7 @@
           <a:bodyPr wrap="square" rtlCol="0" anchor="ctr"/>
           <a:lstStyle/>
           <a:p>
-            <a:pPr indent="0" marL="0">
+            <a:pPr marL="0" indent="0">
               <a:lnSpc>
                 <a:spcPts val="1400"/>
               </a:lnSpc>
@@ -6506,7 +6145,7 @@
           <a:bodyPr wrap="square" rtlCol="0" anchor="ctr"/>
           <a:lstStyle/>
           <a:p>
-            <a:pPr indent="0" marL="0">
+            <a:pPr marL="0" indent="0">
               <a:lnSpc>
                 <a:spcPts val="1400"/>
               </a:lnSpc>
@@ -6548,7 +6187,7 @@
           <a:bodyPr wrap="square" rtlCol="0" anchor="ctr"/>
           <a:lstStyle/>
           <a:p>
-            <a:pPr indent="0" marL="0">
+            <a:pPr marL="0" indent="0">
               <a:lnSpc>
                 <a:spcPts val="1400"/>
               </a:lnSpc>
@@ -6590,7 +6229,7 @@
           <a:bodyPr wrap="square" rtlCol="0" anchor="ctr"/>
           <a:lstStyle/>
           <a:p>
-            <a:pPr indent="0" marL="0">
+            <a:pPr marL="0" indent="0">
               <a:lnSpc>
                 <a:spcPts val="1400"/>
               </a:lnSpc>
@@ -6632,7 +6271,7 @@
           <a:bodyPr wrap="square" rtlCol="0" anchor="ctr"/>
           <a:lstStyle/>
           <a:p>
-            <a:pPr indent="0" marL="0">
+            <a:pPr marL="0" indent="0">
               <a:buNone/>
             </a:pPr>
             <a:r>
@@ -6646,9 +6285,6 @@
               </a:rPr>
               <a:t>期待する成果　</a:t>
             </a:r>
-            <a:pPr indent="0" marL="0">
-              <a:buNone/>
-            </a:pPr>
             <a:r>
               <a:rPr lang="en-US" sz="1300" dirty="0">
                 <a:solidFill>
@@ -6712,7 +6348,7 @@
           <a:bodyPr wrap="square" rtlCol="0" anchor="ctr"/>
           <a:lstStyle/>
           <a:p>
-            <a:pPr indent="0" marL="0">
+            <a:pPr marL="0" indent="0">
               <a:buNone/>
             </a:pPr>
             <a:r>
@@ -6751,7 +6387,7 @@
           <a:bodyPr wrap="square" rtlCol="0" anchor="ctr"/>
           <a:lstStyle/>
           <a:p>
-            <a:pPr indent="0" marL="0">
+            <a:pPr marL="0" indent="0">
               <a:buNone/>
             </a:pPr>
             <a:r>
@@ -6817,7 +6453,7 @@
           <a:bodyPr wrap="square" rtlCol="0" anchor="ctr"/>
           <a:lstStyle/>
           <a:p>
-            <a:pPr indent="0" marL="0">
+            <a:pPr marL="0" indent="0">
               <a:buNone/>
             </a:pPr>
             <a:r>
@@ -6856,7 +6492,7 @@
           <a:bodyPr wrap="square" rtlCol="0" anchor="ctr"/>
           <a:lstStyle/>
           <a:p>
-            <a:pPr indent="0" marL="0">
+            <a:pPr marL="0" indent="0">
               <a:buNone/>
             </a:pPr>
             <a:r>
@@ -6922,7 +6558,7 @@
           <a:bodyPr wrap="square" rtlCol="0" anchor="ctr"/>
           <a:lstStyle/>
           <a:p>
-            <a:pPr indent="0" marL="0">
+            <a:pPr marL="0" indent="0">
               <a:buNone/>
             </a:pPr>
             <a:r>
@@ -6961,7 +6597,7 @@
           <a:bodyPr wrap="square" rtlCol="0" anchor="ctr"/>
           <a:lstStyle/>
           <a:p>
-            <a:pPr indent="0" marL="0">
+            <a:pPr marL="0" indent="0">
               <a:buNone/>
             </a:pPr>
             <a:r>
@@ -7000,7 +6636,7 @@
           <a:bodyPr wrap="square" rtlCol="0" anchor="ctr"/>
           <a:lstStyle/>
           <a:p>
-            <a:pPr indent="0" marL="0">
+            <a:pPr marL="0" indent="0">
               <a:buNone/>
             </a:pPr>
             <a:r>
@@ -7039,7 +6675,7 @@
           <a:bodyPr wrap="square" rtlCol="0" anchor="ctr"/>
           <a:lstStyle/>
           <a:p>
-            <a:pPr algn="r" indent="0" marL="0">
+            <a:pPr marL="0" indent="0" algn="r">
               <a:buNone/>
             </a:pPr>
             <a:r>
@@ -7073,6 +6709,7 @@
         <a:solidFill>
           <a:srgbClr val="FFFFFF"/>
         </a:solidFill>
+        <a:effectLst/>
       </p:bgPr>
     </p:bg>
     <p:spTree>
@@ -7110,11 +6747,11 @@
           <a:bodyPr wrap="square" rtlCol="0" anchor="ctr"/>
           <a:lstStyle/>
           <a:p>
-            <a:pPr indent="0" marL="0">
-              <a:buNone/>
-            </a:pPr>
-            <a:r>
-              <a:rPr lang="en-US" sz="1200" b="1" spc="200" kern="0" dirty="0">
+            <a:pPr marL="0" indent="0">
+              <a:buNone/>
+            </a:pPr>
+            <a:r>
+              <a:rPr lang="en-US" sz="1200" b="1" kern="0" spc="200" dirty="0">
                 <a:solidFill>
                   <a:srgbClr val="C0392B"/>
                 </a:solidFill>
@@ -7149,7 +6786,7 @@
           <a:bodyPr wrap="square" rtlCol="0" anchor="ctr"/>
           <a:lstStyle/>
           <a:p>
-            <a:pPr indent="0" marL="0">
+            <a:pPr marL="0" indent="0">
               <a:buNone/>
             </a:pPr>
             <a:r>
@@ -7215,7 +6852,7 @@
           <a:bodyPr wrap="square" rtlCol="0" anchor="ctr"/>
           <a:lstStyle/>
           <a:p>
-            <a:pPr indent="0" marL="0">
+            <a:pPr marL="0" indent="0">
               <a:buNone/>
             </a:pPr>
             <a:r>
@@ -7254,7 +6891,7 @@
           <a:bodyPr wrap="square" rtlCol="0" anchor="ctr"/>
           <a:lstStyle/>
           <a:p>
-            <a:pPr indent="0" marL="0">
+            <a:pPr marL="0" indent="0">
               <a:buNone/>
             </a:pPr>
             <a:r>
@@ -7313,7 +6950,7 @@
           <a:bodyPr wrap="square" rtlCol="0" anchor="ctr"/>
           <a:lstStyle/>
           <a:p>
-            <a:pPr indent="0" marL="0">
+            <a:pPr marL="0" indent="0">
               <a:lnSpc>
                 <a:spcPts val="1500"/>
               </a:lnSpc>
@@ -7333,7 +6970,7 @@
             <a:endParaRPr lang="en-US" sz="1130" dirty="0"/>
           </a:p>
           <a:p>
-            <a:pPr indent="0" marL="0">
+            <a:pPr marL="0" indent="0">
               <a:lnSpc>
                 <a:spcPts val="1500"/>
               </a:lnSpc>
@@ -7395,7 +7032,7 @@
           <a:bodyPr wrap="square" rtlCol="0" anchor="ctr"/>
           <a:lstStyle/>
           <a:p>
-            <a:pPr indent="0" marL="0">
+            <a:pPr marL="0" indent="0">
               <a:lnSpc>
                 <a:spcPts val="1500"/>
               </a:lnSpc>
@@ -7415,7 +7052,7 @@
             <a:endParaRPr lang="en-US" sz="1130" dirty="0"/>
           </a:p>
           <a:p>
-            <a:pPr indent="0" marL="0">
+            <a:pPr marL="0" indent="0">
               <a:lnSpc>
                 <a:spcPts val="1500"/>
               </a:lnSpc>
@@ -7477,7 +7114,7 @@
           <a:bodyPr wrap="square" rtlCol="0" anchor="ctr"/>
           <a:lstStyle/>
           <a:p>
-            <a:pPr indent="0" marL="0">
+            <a:pPr marL="0" indent="0">
               <a:lnSpc>
                 <a:spcPts val="1500"/>
               </a:lnSpc>
@@ -7497,7 +7134,7 @@
             <a:endParaRPr lang="en-US" sz="1130" dirty="0"/>
           </a:p>
           <a:p>
-            <a:pPr indent="0" marL="0">
+            <a:pPr marL="0" indent="0">
               <a:lnSpc>
                 <a:spcPts val="1500"/>
               </a:lnSpc>
@@ -7561,7 +7198,7 @@
           <a:bodyPr wrap="square" rtlCol="0" anchor="ctr"/>
           <a:lstStyle/>
           <a:p>
-            <a:pPr indent="0" marL="0">
+            <a:pPr marL="0" indent="0">
               <a:buNone/>
             </a:pPr>
             <a:r>
@@ -7600,7 +7237,7 @@
           <a:bodyPr wrap="square" rtlCol="0" anchor="ctr"/>
           <a:lstStyle/>
           <a:p>
-            <a:pPr indent="0" marL="0">
+            <a:pPr marL="0" indent="0">
               <a:buNone/>
             </a:pPr>
             <a:r>
@@ -7639,7 +7276,7 @@
           <a:bodyPr wrap="square" rtlCol="0" anchor="ctr"/>
           <a:lstStyle/>
           <a:p>
-            <a:pPr indent="0" marL="0">
+            <a:pPr marL="0" indent="0">
               <a:buNone/>
             </a:pPr>
             <a:r>
@@ -7678,7 +7315,7 @@
           <a:bodyPr wrap="square" rtlCol="0" anchor="ctr"/>
           <a:lstStyle/>
           <a:p>
-            <a:pPr indent="0" marL="0">
+            <a:pPr marL="0" indent="0">
               <a:lnSpc>
                 <a:spcPts val="1400"/>
               </a:lnSpc>
@@ -7720,7 +7357,7 @@
           <a:bodyPr wrap="square" rtlCol="0" anchor="ctr"/>
           <a:lstStyle/>
           <a:p>
-            <a:pPr indent="0" marL="0">
+            <a:pPr marL="0" indent="0">
               <a:buNone/>
             </a:pPr>
             <a:r>
@@ -7759,7 +7396,7 @@
           <a:bodyPr wrap="square" rtlCol="0" anchor="ctr"/>
           <a:lstStyle/>
           <a:p>
-            <a:pPr indent="0" marL="0">
+            <a:pPr marL="0" indent="0">
               <a:lnSpc>
                 <a:spcPts val="1400"/>
               </a:lnSpc>
@@ -7779,7 +7416,7 @@
             <a:endParaRPr lang="en-US" sz="1080" dirty="0"/>
           </a:p>
           <a:p>
-            <a:pPr indent="0" marL="0">
+            <a:pPr marL="0" indent="0">
               <a:lnSpc>
                 <a:spcPts val="1400"/>
               </a:lnSpc>
@@ -7821,7 +7458,7 @@
           <a:bodyPr wrap="square" rtlCol="0" anchor="ctr"/>
           <a:lstStyle/>
           <a:p>
-            <a:pPr indent="0" marL="0">
+            <a:pPr marL="0" indent="0">
               <a:buNone/>
             </a:pPr>
             <a:r>
@@ -7860,7 +7497,7 @@
           <a:bodyPr wrap="square" rtlCol="0" anchor="ctr"/>
           <a:lstStyle/>
           <a:p>
-            <a:pPr indent="0" marL="0">
+            <a:pPr marL="0" indent="0">
               <a:lnSpc>
                 <a:spcPts val="1400"/>
               </a:lnSpc>
@@ -7880,7 +7517,7 @@
             <a:endParaRPr lang="en-US" sz="1080" dirty="0"/>
           </a:p>
           <a:p>
-            <a:pPr indent="0" marL="0">
+            <a:pPr marL="0" indent="0">
               <a:lnSpc>
                 <a:spcPts val="1400"/>
               </a:lnSpc>
@@ -7922,7 +7559,7 @@
           <a:bodyPr wrap="square" rtlCol="0" anchor="ctr"/>
           <a:lstStyle/>
           <a:p>
-            <a:pPr indent="0" marL="0">
+            <a:pPr marL="0" indent="0">
               <a:buNone/>
             </a:pPr>
             <a:r>
@@ -7961,7 +7598,7 @@
           <a:bodyPr wrap="square" rtlCol="0" anchor="ctr"/>
           <a:lstStyle/>
           <a:p>
-            <a:pPr indent="0" marL="0">
+            <a:pPr marL="0" indent="0">
               <a:lnSpc>
                 <a:spcPts val="1400"/>
               </a:lnSpc>
@@ -7981,7 +7618,7 @@
             <a:endParaRPr lang="en-US" sz="1080" dirty="0"/>
           </a:p>
           <a:p>
-            <a:pPr indent="0" marL="0">
+            <a:pPr marL="0" indent="0">
               <a:lnSpc>
                 <a:spcPts val="1400"/>
               </a:lnSpc>
@@ -8023,7 +7660,7 @@
           <a:bodyPr wrap="square" rtlCol="0" anchor="ctr"/>
           <a:lstStyle/>
           <a:p>
-            <a:pPr algn="r" indent="0" marL="0">
+            <a:pPr marL="0" indent="0" algn="r">
               <a:buNone/>
             </a:pPr>
             <a:r>
@@ -8057,6 +7694,7 @@
         <a:solidFill>
           <a:srgbClr val="0E1830"/>
         </a:solidFill>
+        <a:effectLst/>
       </p:bgPr>
     </p:bg>
     <p:spTree>
@@ -8094,11 +7732,11 @@
           <a:bodyPr wrap="square" rtlCol="0" anchor="ctr"/>
           <a:lstStyle/>
           <a:p>
-            <a:pPr indent="0" marL="0">
-              <a:buNone/>
-            </a:pPr>
-            <a:r>
-              <a:rPr lang="en-US" sz="1200" b="1" spc="200" kern="0" dirty="0">
+            <a:pPr marL="0" indent="0">
+              <a:buNone/>
+            </a:pPr>
+            <a:r>
+              <a:rPr lang="en-US" sz="1200" b="1" kern="0" spc="200" dirty="0">
                 <a:solidFill>
                   <a:srgbClr val="6FA8FF"/>
                 </a:solidFill>
@@ -8133,7 +7771,7 @@
           <a:bodyPr wrap="square" rtlCol="0" anchor="ctr"/>
           <a:lstStyle/>
           <a:p>
-            <a:pPr indent="0" marL="0">
+            <a:pPr marL="0" indent="0">
               <a:buNone/>
             </a:pPr>
             <a:r>
@@ -8199,7 +7837,7 @@
           <a:bodyPr wrap="square" rtlCol="0" anchor="ctr"/>
           <a:lstStyle/>
           <a:p>
-            <a:pPr indent="0" marL="0">
+            <a:pPr marL="0" indent="0">
               <a:buNone/>
             </a:pPr>
             <a:r>
@@ -8258,7 +7896,7 @@
           <a:bodyPr wrap="square" rtlCol="0" anchor="ctr"/>
           <a:lstStyle/>
           <a:p>
-            <a:pPr indent="0" marL="0">
+            <a:pPr marL="0" indent="0">
               <a:lnSpc>
                 <a:spcPts val="1450"/>
               </a:lnSpc>
@@ -8278,7 +7916,7 @@
             <a:endParaRPr lang="en-US" sz="1060" dirty="0"/>
           </a:p>
           <a:p>
-            <a:pPr indent="0" marL="0">
+            <a:pPr marL="0" indent="0">
               <a:lnSpc>
                 <a:spcPts val="1450"/>
               </a:lnSpc>
@@ -8340,7 +7978,7 @@
           <a:bodyPr wrap="square" rtlCol="0" anchor="ctr"/>
           <a:lstStyle/>
           <a:p>
-            <a:pPr indent="0" marL="0">
+            <a:pPr marL="0" indent="0">
               <a:lnSpc>
                 <a:spcPts val="1450"/>
               </a:lnSpc>
@@ -8360,7 +7998,7 @@
             <a:endParaRPr lang="en-US" sz="1060" dirty="0"/>
           </a:p>
           <a:p>
-            <a:pPr indent="0" marL="0">
+            <a:pPr marL="0" indent="0">
               <a:lnSpc>
                 <a:spcPts val="1450"/>
               </a:lnSpc>
@@ -8422,7 +8060,7 @@
           <a:bodyPr wrap="square" rtlCol="0" anchor="ctr"/>
           <a:lstStyle/>
           <a:p>
-            <a:pPr indent="0" marL="0">
+            <a:pPr marL="0" indent="0">
               <a:lnSpc>
                 <a:spcPts val="1450"/>
               </a:lnSpc>
@@ -8442,7 +8080,7 @@
             <a:endParaRPr lang="en-US" sz="1060" dirty="0"/>
           </a:p>
           <a:p>
-            <a:pPr indent="0" marL="0">
+            <a:pPr marL="0" indent="0">
               <a:lnSpc>
                 <a:spcPts val="1450"/>
               </a:lnSpc>
@@ -8511,7 +8149,7 @@
           <a:bodyPr wrap="square" rtlCol="0" anchor="ctr"/>
           <a:lstStyle/>
           <a:p>
-            <a:pPr indent="0" marL="0">
+            <a:pPr marL="0" indent="0">
               <a:buNone/>
             </a:pPr>
             <a:r>
@@ -8570,7 +8208,7 @@
           <a:bodyPr wrap="square" rtlCol="0" anchor="ctr"/>
           <a:lstStyle/>
           <a:p>
-            <a:pPr indent="0" marL="0">
+            <a:pPr marL="0" indent="0">
               <a:lnSpc>
                 <a:spcPts val="1450"/>
               </a:lnSpc>
@@ -8590,7 +8228,7 @@
             <a:endParaRPr lang="en-US" sz="1060" dirty="0"/>
           </a:p>
           <a:p>
-            <a:pPr indent="0" marL="0">
+            <a:pPr marL="0" indent="0">
               <a:lnSpc>
                 <a:spcPts val="1450"/>
               </a:lnSpc>
@@ -8652,7 +8290,7 @@
           <a:bodyPr wrap="square" rtlCol="0" anchor="ctr"/>
           <a:lstStyle/>
           <a:p>
-            <a:pPr indent="0" marL="0">
+            <a:pPr marL="0" indent="0">
               <a:lnSpc>
                 <a:spcPts val="1450"/>
               </a:lnSpc>
@@ -8672,7 +8310,7 @@
             <a:endParaRPr lang="en-US" sz="1060" dirty="0"/>
           </a:p>
           <a:p>
-            <a:pPr indent="0" marL="0">
+            <a:pPr marL="0" indent="0">
               <a:lnSpc>
                 <a:spcPts val="1450"/>
               </a:lnSpc>
@@ -8734,7 +8372,7 @@
           <a:bodyPr wrap="square" rtlCol="0" anchor="ctr"/>
           <a:lstStyle/>
           <a:p>
-            <a:pPr indent="0" marL="0">
+            <a:pPr marL="0" indent="0">
               <a:lnSpc>
                 <a:spcPts val="1450"/>
               </a:lnSpc>
@@ -8754,7 +8392,7 @@
             <a:endParaRPr lang="en-US" sz="1060" dirty="0"/>
           </a:p>
           <a:p>
-            <a:pPr indent="0" marL="0">
+            <a:pPr marL="0" indent="0">
               <a:lnSpc>
                 <a:spcPts val="1450"/>
               </a:lnSpc>
@@ -8823,7 +8461,7 @@
           <a:bodyPr wrap="square" rtlCol="0" anchor="ctr"/>
           <a:lstStyle/>
           <a:p>
-            <a:pPr indent="0" marL="0">
+            <a:pPr marL="0" indent="0">
               <a:buNone/>
             </a:pPr>
             <a:r>
@@ -8882,7 +8520,7 @@
           <a:bodyPr wrap="square" rtlCol="0" anchor="ctr"/>
           <a:lstStyle/>
           <a:p>
-            <a:pPr indent="0" marL="0">
+            <a:pPr marL="0" indent="0">
               <a:lnSpc>
                 <a:spcPts val="1450"/>
               </a:lnSpc>
@@ -8902,7 +8540,7 @@
             <a:endParaRPr lang="en-US" sz="1060" dirty="0"/>
           </a:p>
           <a:p>
-            <a:pPr indent="0" marL="0">
+            <a:pPr marL="0" indent="0">
               <a:lnSpc>
                 <a:spcPts val="1450"/>
               </a:lnSpc>
@@ -8964,7 +8602,7 @@
           <a:bodyPr wrap="square" rtlCol="0" anchor="ctr"/>
           <a:lstStyle/>
           <a:p>
-            <a:pPr indent="0" marL="0">
+            <a:pPr marL="0" indent="0">
               <a:lnSpc>
                 <a:spcPts val="1450"/>
               </a:lnSpc>
@@ -8984,7 +8622,7 @@
             <a:endParaRPr lang="en-US" sz="1060" dirty="0"/>
           </a:p>
           <a:p>
-            <a:pPr indent="0" marL="0">
+            <a:pPr marL="0" indent="0">
               <a:lnSpc>
                 <a:spcPts val="1450"/>
               </a:lnSpc>
@@ -9046,7 +8684,7 @@
           <a:bodyPr wrap="square" rtlCol="0" anchor="ctr"/>
           <a:lstStyle/>
           <a:p>
-            <a:pPr indent="0" marL="0">
+            <a:pPr marL="0" indent="0">
               <a:lnSpc>
                 <a:spcPts val="1450"/>
               </a:lnSpc>
@@ -9066,7 +8704,7 @@
             <a:endParaRPr lang="en-US" sz="1060" dirty="0"/>
           </a:p>
           <a:p>
-            <a:pPr indent="0" marL="0">
+            <a:pPr marL="0" indent="0">
               <a:lnSpc>
                 <a:spcPts val="1450"/>
               </a:lnSpc>
@@ -9108,7 +8746,7 @@
           <a:bodyPr wrap="square" rtlCol="0" anchor="ctr"/>
           <a:lstStyle/>
           <a:p>
-            <a:pPr algn="r" indent="0" marL="0">
+            <a:pPr marL="0" indent="0" algn="r">
               <a:buNone/>
             </a:pPr>
             <a:r>
@@ -9142,6 +8780,7 @@
         <a:solidFill>
           <a:srgbClr val="FFFFFF"/>
         </a:solidFill>
+        <a:effectLst/>
       </p:bgPr>
     </p:bg>
     <p:spTree>
@@ -9179,11 +8818,11 @@
           <a:bodyPr wrap="square" rtlCol="0" anchor="ctr"/>
           <a:lstStyle/>
           <a:p>
-            <a:pPr indent="0" marL="0">
-              <a:buNone/>
-            </a:pPr>
-            <a:r>
-              <a:rPr lang="en-US" sz="1200" b="1" spc="200" kern="0" dirty="0">
+            <a:pPr marL="0" indent="0">
+              <a:buNone/>
+            </a:pPr>
+            <a:r>
+              <a:rPr lang="en-US" sz="1200" b="1" kern="0" spc="200" dirty="0">
                 <a:solidFill>
                   <a:srgbClr val="C0392B"/>
                 </a:solidFill>
@@ -9218,7 +8857,7 @@
           <a:bodyPr wrap="square" rtlCol="0" anchor="ctr"/>
           <a:lstStyle/>
           <a:p>
-            <a:pPr indent="0" marL="0">
+            <a:pPr marL="0" indent="0">
               <a:buNone/>
             </a:pPr>
             <a:r>
@@ -9279,7 +8918,7 @@
           <a:bodyPr wrap="square" rtlCol="0" anchor="ctr"/>
           <a:lstStyle/>
           <a:p>
-            <a:pPr algn="ctr" indent="0" marL="0">
+            <a:pPr marL="0" indent="0" algn="ctr">
               <a:buNone/>
             </a:pPr>
             <a:r>
@@ -9318,7 +8957,7 @@
           <a:bodyPr wrap="square" rtlCol="0" anchor="ctr"/>
           <a:lstStyle/>
           <a:p>
-            <a:pPr indent="0" marL="0">
+            <a:pPr marL="0" indent="0">
               <a:buNone/>
             </a:pPr>
             <a:r>
@@ -9357,7 +8996,7 @@
           <a:bodyPr wrap="square" rtlCol="0" anchor="ctr"/>
           <a:lstStyle/>
           <a:p>
-            <a:pPr indent="0" marL="0">
+            <a:pPr marL="0" indent="0">
               <a:buNone/>
             </a:pPr>
             <a:r>
@@ -9396,7 +9035,7 @@
           <a:bodyPr wrap="square" rtlCol="0" anchor="ctr"/>
           <a:lstStyle/>
           <a:p>
-            <a:pPr indent="0" marL="0">
+            <a:pPr marL="0" indent="0">
               <a:buNone/>
             </a:pPr>
             <a:r>
@@ -9435,7 +9074,7 @@
           <a:bodyPr wrap="square" rtlCol="0" anchor="ctr"/>
           <a:lstStyle/>
           <a:p>
-            <a:pPr indent="0" marL="0">
+            <a:pPr marL="0" indent="0">
               <a:buNone/>
             </a:pPr>
             <a:r>
@@ -9496,7 +9135,7 @@
           <a:bodyPr wrap="square" rtlCol="0" anchor="ctr"/>
           <a:lstStyle/>
           <a:p>
-            <a:pPr algn="ctr" indent="0" marL="0">
+            <a:pPr marL="0" indent="0" algn="ctr">
               <a:buNone/>
             </a:pPr>
             <a:r>
@@ -9535,7 +9174,7 @@
           <a:bodyPr wrap="square" rtlCol="0" anchor="ctr"/>
           <a:lstStyle/>
           <a:p>
-            <a:pPr indent="0" marL="0">
+            <a:pPr marL="0" indent="0">
               <a:buNone/>
             </a:pPr>
             <a:r>
@@ -9574,7 +9213,7 @@
           <a:bodyPr wrap="square" rtlCol="0" anchor="ctr"/>
           <a:lstStyle/>
           <a:p>
-            <a:pPr indent="0" marL="0">
+            <a:pPr marL="0" indent="0">
               <a:buNone/>
             </a:pPr>
             <a:r>
@@ -9613,7 +9252,7 @@
           <a:bodyPr wrap="square" rtlCol="0" anchor="ctr"/>
           <a:lstStyle/>
           <a:p>
-            <a:pPr indent="0" marL="0">
+            <a:pPr marL="0" indent="0">
               <a:buNone/>
             </a:pPr>
             <a:r>
@@ -9652,7 +9291,7 @@
           <a:bodyPr wrap="square" rtlCol="0" anchor="ctr"/>
           <a:lstStyle/>
           <a:p>
-            <a:pPr indent="0" marL="0">
+            <a:pPr marL="0" indent="0">
               <a:buNone/>
             </a:pPr>
             <a:r>
@@ -9713,7 +9352,7 @@
           <a:bodyPr wrap="square" rtlCol="0" anchor="ctr"/>
           <a:lstStyle/>
           <a:p>
-            <a:pPr algn="ctr" indent="0" marL="0">
+            <a:pPr marL="0" indent="0" algn="ctr">
               <a:buNone/>
             </a:pPr>
             <a:r>
@@ -9752,7 +9391,7 @@
           <a:bodyPr wrap="square" rtlCol="0" anchor="ctr"/>
           <a:lstStyle/>
           <a:p>
-            <a:pPr indent="0" marL="0">
+            <a:pPr marL="0" indent="0">
               <a:buNone/>
             </a:pPr>
             <a:r>
@@ -9791,7 +9430,7 @@
           <a:bodyPr wrap="square" rtlCol="0" anchor="ctr"/>
           <a:lstStyle/>
           <a:p>
-            <a:pPr indent="0" marL="0">
+            <a:pPr marL="0" indent="0">
               <a:buNone/>
             </a:pPr>
             <a:r>
@@ -9830,7 +9469,7 @@
           <a:bodyPr wrap="square" rtlCol="0" anchor="ctr"/>
           <a:lstStyle/>
           <a:p>
-            <a:pPr indent="0" marL="0">
+            <a:pPr marL="0" indent="0">
               <a:buNone/>
             </a:pPr>
             <a:r>
@@ -9869,7 +9508,7 @@
           <a:bodyPr wrap="square" rtlCol="0" anchor="ctr"/>
           <a:lstStyle/>
           <a:p>
-            <a:pPr algn="r" indent="0" marL="0">
+            <a:pPr marL="0" indent="0" algn="r">
               <a:buNone/>
             </a:pPr>
             <a:r>
@@ -10188,4 +9827,299 @@
     </a:ext>
   </a:extLst>
 </a:theme>
+</file>
+
+<file path=ppt/theme/theme2.xml><?xml version="1.0" encoding="utf-8"?>
+<a:theme xmlns:a="http://schemas.openxmlformats.org/drawingml/2006/main" name="Office テーマ">
+  <a:themeElements>
+    <a:clrScheme name="Office">
+      <a:dk1>
+        <a:sysClr val="windowText" lastClr="000000"/>
+      </a:dk1>
+      <a:lt1>
+        <a:sysClr val="window" lastClr="FFFFFF"/>
+      </a:lt1>
+      <a:dk2>
+        <a:srgbClr val="44546A"/>
+      </a:dk2>
+      <a:lt2>
+        <a:srgbClr val="E7E6E6"/>
+      </a:lt2>
+      <a:accent1>
+        <a:srgbClr val="4472C4"/>
+      </a:accent1>
+      <a:accent2>
+        <a:srgbClr val="ED7D31"/>
+      </a:accent2>
+      <a:accent3>
+        <a:srgbClr val="A5A5A5"/>
+      </a:accent3>
+      <a:accent4>
+        <a:srgbClr val="FFC000"/>
+      </a:accent4>
+      <a:accent5>
+        <a:srgbClr val="5B9BD5"/>
+      </a:accent5>
+      <a:accent6>
+        <a:srgbClr val="70AD47"/>
+      </a:accent6>
+      <a:hlink>
+        <a:srgbClr val="0563C1"/>
+      </a:hlink>
+      <a:folHlink>
+        <a:srgbClr val="954F72"/>
+      </a:folHlink>
+    </a:clrScheme>
+    <a:fontScheme name="Office">
+      <a:majorFont>
+        <a:latin typeface="游ゴシック Light" panose="020F0302020204030204"/>
+        <a:ea typeface=""/>
+        <a:cs typeface=""/>
+        <a:font script="Jpan" typeface="游ゴシック Light"/>
+        <a:font script="Hang" typeface="맑은 고딕"/>
+        <a:font script="Hans" typeface="等线 Light"/>
+        <a:font script="Hant" typeface="新細明體"/>
+        <a:font script="Arab" typeface="Times New Roman"/>
+        <a:font script="Hebr" typeface="Times New Roman"/>
+        <a:font script="Thai" typeface="Angsana New"/>
+        <a:font script="Ethi" typeface="Nyala"/>
+        <a:font script="Beng" typeface="Vrinda"/>
+        <a:font script="Gujr" typeface="Shruti"/>
+        <a:font script="Khmr" typeface="MoolBoran"/>
+        <a:font script="Knda" typeface="Tunga"/>
+        <a:font script="Guru" typeface="Raavi"/>
+        <a:font script="Cans" typeface="Euphemia"/>
+        <a:font script="Cher" typeface="Plantagenet Cherokee"/>
+        <a:font script="Yiii" typeface="Microsoft Yi Baiti"/>
+        <a:font script="Tibt" typeface="Microsoft Himalaya"/>
+        <a:font script="Thaa" typeface="MV Boli"/>
+        <a:font script="Deva" typeface="Mangal"/>
+        <a:font script="Telu" typeface="Gautami"/>
+        <a:font script="Taml" typeface="Latha"/>
+        <a:font script="Syrc" typeface="Estrangelo Edessa"/>
+        <a:font script="Orya" typeface="Kalinga"/>
+        <a:font script="Mlym" typeface="Kartika"/>
+        <a:font script="Laoo" typeface="DokChampa"/>
+        <a:font script="Sinh" typeface="Iskoola Pota"/>
+        <a:font script="Mong" typeface="Mongolian Baiti"/>
+        <a:font script="Viet" typeface="Times New Roman"/>
+        <a:font script="Uigh" typeface="Microsoft Uighur"/>
+        <a:font script="Geor" typeface="Sylfaen"/>
+        <a:font script="Armn" typeface="Arial"/>
+        <a:font script="Bugi" typeface="Leelawadee UI"/>
+        <a:font script="Bopo" typeface="Microsoft JhengHei"/>
+        <a:font script="Java" typeface="Javanese Text"/>
+        <a:font script="Lisu" typeface="Segoe UI"/>
+        <a:font script="Mymr" typeface="Myanmar Text"/>
+        <a:font script="Nkoo" typeface="Ebrima"/>
+        <a:font script="Olck" typeface="Nirmala UI"/>
+        <a:font script="Osma" typeface="Ebrima"/>
+        <a:font script="Phag" typeface="Phagspa"/>
+        <a:font script="Syrn" typeface="Estrangelo Edessa"/>
+        <a:font script="Syrj" typeface="Estrangelo Edessa"/>
+        <a:font script="Syre" typeface="Estrangelo Edessa"/>
+        <a:font script="Sora" typeface="Nirmala UI"/>
+        <a:font script="Tale" typeface="Microsoft Tai Le"/>
+        <a:font script="Talu" typeface="Microsoft New Tai Lue"/>
+        <a:font script="Tfng" typeface="Ebrima"/>
+      </a:majorFont>
+      <a:minorFont>
+        <a:latin typeface="游ゴシック" panose="020F0502020204030204"/>
+        <a:ea typeface=""/>
+        <a:cs typeface=""/>
+        <a:font script="Jpan" typeface="游ゴシック"/>
+        <a:font script="Hang" typeface="맑은 고딕"/>
+        <a:font script="Hans" typeface="等线"/>
+        <a:font script="Hant" typeface="新細明體"/>
+        <a:font script="Arab" typeface="Arial"/>
+        <a:font script="Hebr" typeface="Arial"/>
+        <a:font script="Thai" typeface="Cordia New"/>
+        <a:font script="Ethi" typeface="Nyala"/>
+        <a:font script="Beng" typeface="Vrinda"/>
+        <a:font script="Gujr" typeface="Shruti"/>
+        <a:font script="Khmr" typeface="DaunPenh"/>
+        <a:font script="Knda" typeface="Tunga"/>
+        <a:font script="Guru" typeface="Raavi"/>
+        <a:font script="Cans" typeface="Euphemia"/>
+        <a:font script="Cher" typeface="Plantagenet Cherokee"/>
+        <a:font script="Yiii" typeface="Microsoft Yi Baiti"/>
+        <a:font script="Tibt" typeface="Microsoft Himalaya"/>
+        <a:font script="Thaa" typeface="MV Boli"/>
+        <a:font script="Deva" typeface="Mangal"/>
+        <a:font script="Telu" typeface="Gautami"/>
+        <a:font script="Taml" typeface="Latha"/>
+        <a:font script="Syrc" typeface="Estrangelo Edessa"/>
+        <a:font script="Orya" typeface="Kalinga"/>
+        <a:font script="Mlym" typeface="Kartika"/>
+        <a:font script="Laoo" typeface="DokChampa"/>
+        <a:font script="Sinh" typeface="Iskoola Pota"/>
+        <a:font script="Mong" typeface="Mongolian Baiti"/>
+        <a:font script="Viet" typeface="Arial"/>
+        <a:font script="Uigh" typeface="Microsoft Uighur"/>
+        <a:font script="Geor" typeface="Sylfaen"/>
+        <a:font script="Armn" typeface="Arial"/>
+        <a:font script="Bugi" typeface="Leelawadee UI"/>
+        <a:font script="Bopo" typeface="Microsoft JhengHei"/>
+        <a:font script="Java" typeface="Javanese Text"/>
+        <a:font script="Lisu" typeface="Segoe UI"/>
+        <a:font script="Mymr" typeface="Myanmar Text"/>
+        <a:font script="Nkoo" typeface="Ebrima"/>
+        <a:font script="Olck" typeface="Nirmala UI"/>
+        <a:font script="Osma" typeface="Ebrima"/>
+        <a:font script="Phag" typeface="Phagspa"/>
+        <a:font script="Syrn" typeface="Estrangelo Edessa"/>
+        <a:font script="Syrj" typeface="Estrangelo Edessa"/>
+        <a:font script="Syre" typeface="Estrangelo Edessa"/>
+        <a:font script="Sora" typeface="Nirmala UI"/>
+        <a:font script="Tale" typeface="Microsoft Tai Le"/>
+        <a:font script="Talu" typeface="Microsoft New Tai Lue"/>
+        <a:font script="Tfng" typeface="Ebrima"/>
+      </a:minorFont>
+    </a:fontScheme>
+    <a:fmtScheme name="Office">
+      <a:fillStyleLst>
+        <a:solidFill>
+          <a:schemeClr val="phClr"/>
+        </a:solidFill>
+        <a:gradFill rotWithShape="1">
+          <a:gsLst>
+            <a:gs pos="0">
+              <a:schemeClr val="phClr">
+                <a:lumMod val="110000"/>
+                <a:satMod val="105000"/>
+                <a:tint val="67000"/>
+              </a:schemeClr>
+            </a:gs>
+            <a:gs pos="50000">
+              <a:schemeClr val="phClr">
+                <a:lumMod val="105000"/>
+                <a:satMod val="103000"/>
+                <a:tint val="73000"/>
+              </a:schemeClr>
+            </a:gs>
+            <a:gs pos="100000">
+              <a:schemeClr val="phClr">
+                <a:lumMod val="105000"/>
+                <a:satMod val="109000"/>
+                <a:tint val="81000"/>
+              </a:schemeClr>
+            </a:gs>
+          </a:gsLst>
+          <a:lin ang="5400000" scaled="0"/>
+        </a:gradFill>
+        <a:gradFill rotWithShape="1">
+          <a:gsLst>
+            <a:gs pos="0">
+              <a:schemeClr val="phClr">
+                <a:satMod val="103000"/>
+                <a:lumMod val="102000"/>
+                <a:tint val="94000"/>
+              </a:schemeClr>
+            </a:gs>
+            <a:gs pos="50000">
+              <a:schemeClr val="phClr">
+                <a:satMod val="110000"/>
+                <a:lumMod val="100000"/>
+                <a:shade val="100000"/>
+              </a:schemeClr>
+            </a:gs>
+            <a:gs pos="100000">
+              <a:schemeClr val="phClr">
+                <a:lumMod val="99000"/>
+                <a:satMod val="120000"/>
+                <a:shade val="78000"/>
+              </a:schemeClr>
+            </a:gs>
+          </a:gsLst>
+          <a:lin ang="5400000" scaled="0"/>
+        </a:gradFill>
+      </a:fillStyleLst>
+      <a:lnStyleLst>
+        <a:ln w="6350" cap="flat" cmpd="sng" algn="ctr">
+          <a:solidFill>
+            <a:schemeClr val="phClr"/>
+          </a:solidFill>
+          <a:prstDash val="solid"/>
+          <a:miter lim="800000"/>
+        </a:ln>
+        <a:ln w="12700" cap="flat" cmpd="sng" algn="ctr">
+          <a:solidFill>
+            <a:schemeClr val="phClr"/>
+          </a:solidFill>
+          <a:prstDash val="solid"/>
+          <a:miter lim="800000"/>
+        </a:ln>
+        <a:ln w="19050" cap="flat" cmpd="sng" algn="ctr">
+          <a:solidFill>
+            <a:schemeClr val="phClr"/>
+          </a:solidFill>
+          <a:prstDash val="solid"/>
+          <a:miter lim="800000"/>
+        </a:ln>
+      </a:lnStyleLst>
+      <a:effectStyleLst>
+        <a:effectStyle>
+          <a:effectLst/>
+        </a:effectStyle>
+        <a:effectStyle>
+          <a:effectLst/>
+        </a:effectStyle>
+        <a:effectStyle>
+          <a:effectLst>
+            <a:outerShdw blurRad="57150" dist="19050" dir="5400000" algn="ctr" rotWithShape="0">
+              <a:srgbClr val="000000">
+                <a:alpha val="63000"/>
+              </a:srgbClr>
+            </a:outerShdw>
+          </a:effectLst>
+        </a:effectStyle>
+      </a:effectStyleLst>
+      <a:bgFillStyleLst>
+        <a:solidFill>
+          <a:schemeClr val="phClr"/>
+        </a:solidFill>
+        <a:solidFill>
+          <a:schemeClr val="phClr">
+            <a:tint val="95000"/>
+            <a:satMod val="170000"/>
+          </a:schemeClr>
+        </a:solidFill>
+        <a:gradFill rotWithShape="1">
+          <a:gsLst>
+            <a:gs pos="0">
+              <a:schemeClr val="phClr">
+                <a:tint val="93000"/>
+                <a:satMod val="150000"/>
+                <a:shade val="98000"/>
+                <a:lumMod val="102000"/>
+              </a:schemeClr>
+            </a:gs>
+            <a:gs pos="50000">
+              <a:schemeClr val="phClr">
+                <a:tint val="98000"/>
+                <a:satMod val="130000"/>
+                <a:shade val="90000"/>
+                <a:lumMod val="103000"/>
+              </a:schemeClr>
+            </a:gs>
+            <a:gs pos="100000">
+              <a:schemeClr val="phClr">
+                <a:shade val="63000"/>
+                <a:satMod val="120000"/>
+              </a:schemeClr>
+            </a:gs>
+          </a:gsLst>
+          <a:lin ang="5400000" scaled="0"/>
+        </a:gradFill>
+      </a:bgFillStyleLst>
+    </a:fmtScheme>
+  </a:themeElements>
+  <a:objectDefaults/>
+  <a:extraClrSchemeLst/>
+  <a:extLst>
+    <a:ext uri="{05A4C25C-085E-4340-85A3-A5531E510DB2}">
+      <thm15:themeFamily xmlns:thm15="http://schemas.microsoft.com/office/thememl/2012/main" name="Office Theme" id="{62F939B6-93AF-4DB8-9C6B-D6C7DFDC589F}" vid="{4A3C46E8-61CC-4603-A589-7422A47A8E4A}"/>
+    </a:ext>
+  </a:extLst>
+</a:theme>
 </file>